--- a/Module7/Курсовой_проект_Пинг-понг на DirectDraw.pptx
+++ b/Module7/Курсовой_проект_Пинг-понг на DirectDraw.pptx
@@ -5,25 +5,21 @@
     <p:sldMasterId id="2147483648" r:id="rId1"/>
   </p:sldMasterIdLst>
   <p:notesMasterIdLst>
-    <p:notesMasterId r:id="rId18"/>
+    <p:notesMasterId r:id="rId14"/>
   </p:notesMasterIdLst>
   <p:sldIdLst>
     <p:sldId id="256" r:id="rId2"/>
-    <p:sldId id="257" r:id="rId3"/>
-    <p:sldId id="258" r:id="rId4"/>
-    <p:sldId id="259" r:id="rId5"/>
-    <p:sldId id="260" r:id="rId6"/>
-    <p:sldId id="261" r:id="rId7"/>
-    <p:sldId id="262" r:id="rId8"/>
-    <p:sldId id="269" r:id="rId9"/>
-    <p:sldId id="270" r:id="rId10"/>
-    <p:sldId id="265" r:id="rId11"/>
-    <p:sldId id="271" r:id="rId12"/>
-    <p:sldId id="272" r:id="rId13"/>
-    <p:sldId id="264" r:id="rId14"/>
-    <p:sldId id="266" r:id="rId15"/>
-    <p:sldId id="267" r:id="rId16"/>
-    <p:sldId id="268" r:id="rId17"/>
+    <p:sldId id="258" r:id="rId3"/>
+    <p:sldId id="259" r:id="rId4"/>
+    <p:sldId id="260" r:id="rId5"/>
+    <p:sldId id="261" r:id="rId6"/>
+    <p:sldId id="262" r:id="rId7"/>
+    <p:sldId id="269" r:id="rId8"/>
+    <p:sldId id="265" r:id="rId9"/>
+    <p:sldId id="271" r:id="rId10"/>
+    <p:sldId id="272" r:id="rId11"/>
+    <p:sldId id="264" r:id="rId12"/>
+    <p:sldId id="266" r:id="rId13"/>
   </p:sldIdLst>
   <p:sldSz cx="12192000" cy="6858000"/>
   <p:notesSz cx="6858000" cy="9144000"/>
@@ -212,7 +208,7 @@
           <a:p>
             <a:fld id="{AA387F73-0C88-42F2-9BDE-7590B0D75213}" type="datetimeFigureOut">
               <a:rPr lang="ru-RU" smtClean="0"/>
-              <a:t>20.10.2026</a:t>
+              <a:t>23.10.2026</a:t>
             </a:fld>
             <a:endParaRPr lang="ru-RU"/>
           </a:p>
@@ -544,7 +540,7 @@
           <a:p>
             <a:fld id="{6AA92BD3-E36B-4B68-977F-E48C6B650896}" type="slidenum">
               <a:rPr lang="ru-RU" smtClean="0"/>
-              <a:t>8</a:t>
+              <a:t>7</a:t>
             </a:fld>
             <a:endParaRPr lang="ru-RU"/>
           </a:p>
@@ -710,7 +706,7 @@
           <a:p>
             <a:fld id="{E00918C5-2AE0-4FFF-9C3C-7410AC1801E9}" type="datetimeFigureOut">
               <a:rPr lang="ru-RU" smtClean="0"/>
-              <a:t>20.10.2026</a:t>
+              <a:t>23.10.2026</a:t>
             </a:fld>
             <a:endParaRPr lang="ru-RU"/>
           </a:p>
@@ -908,7 +904,7 @@
           <a:p>
             <a:fld id="{E00918C5-2AE0-4FFF-9C3C-7410AC1801E9}" type="datetimeFigureOut">
               <a:rPr lang="ru-RU" smtClean="0"/>
-              <a:t>20.10.2026</a:t>
+              <a:t>23.10.2026</a:t>
             </a:fld>
             <a:endParaRPr lang="ru-RU"/>
           </a:p>
@@ -1116,7 +1112,7 @@
           <a:p>
             <a:fld id="{E00918C5-2AE0-4FFF-9C3C-7410AC1801E9}" type="datetimeFigureOut">
               <a:rPr lang="ru-RU" smtClean="0"/>
-              <a:t>20.10.2026</a:t>
+              <a:t>23.10.2026</a:t>
             </a:fld>
             <a:endParaRPr lang="ru-RU"/>
           </a:p>
@@ -1314,7 +1310,7 @@
           <a:p>
             <a:fld id="{E00918C5-2AE0-4FFF-9C3C-7410AC1801E9}" type="datetimeFigureOut">
               <a:rPr lang="ru-RU" smtClean="0"/>
-              <a:t>20.10.2026</a:t>
+              <a:t>23.10.2026</a:t>
             </a:fld>
             <a:endParaRPr lang="ru-RU"/>
           </a:p>
@@ -1589,7 +1585,7 @@
           <a:p>
             <a:fld id="{E00918C5-2AE0-4FFF-9C3C-7410AC1801E9}" type="datetimeFigureOut">
               <a:rPr lang="ru-RU" smtClean="0"/>
-              <a:t>20.10.2026</a:t>
+              <a:t>23.10.2026</a:t>
             </a:fld>
             <a:endParaRPr lang="ru-RU"/>
           </a:p>
@@ -1854,7 +1850,7 @@
           <a:p>
             <a:fld id="{E00918C5-2AE0-4FFF-9C3C-7410AC1801E9}" type="datetimeFigureOut">
               <a:rPr lang="ru-RU" smtClean="0"/>
-              <a:t>20.10.2026</a:t>
+              <a:t>23.10.2026</a:t>
             </a:fld>
             <a:endParaRPr lang="ru-RU"/>
           </a:p>
@@ -2266,7 +2262,7 @@
           <a:p>
             <a:fld id="{E00918C5-2AE0-4FFF-9C3C-7410AC1801E9}" type="datetimeFigureOut">
               <a:rPr lang="ru-RU" smtClean="0"/>
-              <a:t>20.10.2026</a:t>
+              <a:t>23.10.2026</a:t>
             </a:fld>
             <a:endParaRPr lang="ru-RU"/>
           </a:p>
@@ -2407,7 +2403,7 @@
           <a:p>
             <a:fld id="{E00918C5-2AE0-4FFF-9C3C-7410AC1801E9}" type="datetimeFigureOut">
               <a:rPr lang="ru-RU" smtClean="0"/>
-              <a:t>20.10.2026</a:t>
+              <a:t>23.10.2026</a:t>
             </a:fld>
             <a:endParaRPr lang="ru-RU"/>
           </a:p>
@@ -2520,7 +2516,7 @@
           <a:p>
             <a:fld id="{E00918C5-2AE0-4FFF-9C3C-7410AC1801E9}" type="datetimeFigureOut">
               <a:rPr lang="ru-RU" smtClean="0"/>
-              <a:t>20.10.2026</a:t>
+              <a:t>23.10.2026</a:t>
             </a:fld>
             <a:endParaRPr lang="ru-RU"/>
           </a:p>
@@ -2831,7 +2827,7 @@
           <a:p>
             <a:fld id="{E00918C5-2AE0-4FFF-9C3C-7410AC1801E9}" type="datetimeFigureOut">
               <a:rPr lang="ru-RU" smtClean="0"/>
-              <a:t>20.10.2026</a:t>
+              <a:t>23.10.2026</a:t>
             </a:fld>
             <a:endParaRPr lang="ru-RU"/>
           </a:p>
@@ -3119,7 +3115,7 @@
           <a:p>
             <a:fld id="{E00918C5-2AE0-4FFF-9C3C-7410AC1801E9}" type="datetimeFigureOut">
               <a:rPr lang="ru-RU" smtClean="0"/>
-              <a:t>20.10.2026</a:t>
+              <a:t>23.10.2026</a:t>
             </a:fld>
             <a:endParaRPr lang="ru-RU"/>
           </a:p>
@@ -3360,7 +3356,7 @@
           <a:p>
             <a:fld id="{E00918C5-2AE0-4FFF-9C3C-7410AC1801E9}" type="datetimeFigureOut">
               <a:rPr lang="ru-RU" smtClean="0"/>
-              <a:t>20.10.2026</a:t>
+              <a:t>23.10.2026</a:t>
             </a:fld>
             <a:endParaRPr lang="ru-RU"/>
           </a:p>
@@ -4413,127 +4409,54 @@
       </p:pic>
       <p:sp>
         <p:nvSpPr>
-          <p:cNvPr id="3" name="TextBox 2">
-            <a:extLst>
-              <a:ext uri="{FF2B5EF4-FFF2-40B4-BE49-F238E27FC236}">
-                <a16:creationId xmlns:a16="http://schemas.microsoft.com/office/drawing/2014/main" id="{3BA06E7D-D943-B02A-4AE7-43C00BDA11AF}"/>
-              </a:ext>
-            </a:extLst>
-          </p:cNvPr>
-          <p:cNvSpPr txBox="1"/>
+          <p:cNvPr id="5" name="Прямоугольник 4">
+            <a:extLst>
+              <a:ext uri="{FF2B5EF4-FFF2-40B4-BE49-F238E27FC236}">
+                <a16:creationId xmlns:a16="http://schemas.microsoft.com/office/drawing/2014/main" id="{A11DEBCD-3A3A-8744-AE62-3FE304EDE3EE}"/>
+              </a:ext>
+            </a:extLst>
+          </p:cNvPr>
+          <p:cNvSpPr/>
           <p:nvPr/>
         </p:nvSpPr>
         <p:spPr>
           <a:xfrm>
-            <a:off x="155408" y="84038"/>
-            <a:ext cx="3479332" cy="769441"/>
+            <a:off x="1558636" y="301336"/>
+            <a:ext cx="9112828" cy="6307282"/>
           </a:xfrm>
           <a:prstGeom prst="rect">
             <a:avLst/>
           </a:prstGeom>
-          <a:noFill/>
-        </p:spPr>
-        <p:txBody>
-          <a:bodyPr wrap="square">
-            <a:spAutoFit/>
-          </a:bodyPr>
-          <a:lstStyle/>
-          <a:p>
-            <a:r>
-              <a:rPr lang="ru-RU" sz="4400" b="0" dirty="0">
-                <a:latin typeface="Bahnschrift SemiBold Condensed" panose="020B0502040204020203" pitchFamily="34" charset="0"/>
-              </a:rPr>
-              <a:t>Схема алгоритма</a:t>
-            </a:r>
-            <a:endParaRPr lang="ru-RU" sz="4400" dirty="0">
-              <a:latin typeface="Bahnschrift SemiBold Condensed" panose="020B0502040204020203" pitchFamily="34" charset="0"/>
-            </a:endParaRPr>
-          </a:p>
-        </p:txBody>
-      </p:sp>
-      <p:sp>
-        <p:nvSpPr>
-          <p:cNvPr id="8" name="TextBox 7">
-            <a:extLst>
-              <a:ext uri="{FF2B5EF4-FFF2-40B4-BE49-F238E27FC236}">
-                <a16:creationId xmlns:a16="http://schemas.microsoft.com/office/drawing/2014/main" id="{5A84AA39-D972-5ACD-97A0-99D6E07DE12D}"/>
-              </a:ext>
-            </a:extLst>
-          </p:cNvPr>
-          <p:cNvSpPr txBox="1"/>
-          <p:nvPr/>
-        </p:nvSpPr>
-        <p:spPr>
-          <a:xfrm>
-            <a:off x="-1" y="853479"/>
-            <a:ext cx="8198427" cy="5586145"/>
-          </a:xfrm>
-          <a:prstGeom prst="rect">
-            <a:avLst/>
-          </a:prstGeom>
-          <a:noFill/>
-        </p:spPr>
-        <p:txBody>
-          <a:bodyPr wrap="square">
-            <a:spAutoFit/>
-          </a:bodyPr>
-          <a:lstStyle/>
-          <a:p>
-            <a:pPr indent="363538"/>
-            <a:r>
-              <a:rPr lang="ru-BY" sz="2100" dirty="0">
-                <a:latin typeface="Times New Roman" panose="02020603050405020304" pitchFamily="18" charset="0"/>
-                <a:cs typeface="Times New Roman" panose="02020603050405020304" pitchFamily="18" charset="0"/>
-              </a:rPr>
-              <a:t>Для успешного проектирования программного обеспечения важно тщательно продумать алгоритмы, которые будут использоваться в программе. Одним из ключевых аспектов разработки игрового приложения является организация игрового цикла – основы любой игры.</a:t>
-            </a:r>
-          </a:p>
-          <a:p>
-            <a:pPr indent="363538"/>
-            <a:r>
-              <a:rPr lang="ru-BY" sz="2100" dirty="0">
-                <a:latin typeface="Times New Roman" panose="02020603050405020304" pitchFamily="18" charset="0"/>
-                <a:cs typeface="Times New Roman" panose="02020603050405020304" pitchFamily="18" charset="0"/>
-              </a:rPr>
-              <a:t>В рамках программного обеспечения «PING PONG» алгоритм игрового цикла включает следующие этапы: обработка ввода с клавиатуры (клавиши W, S, стрелки, P, </a:t>
-            </a:r>
-            <a:r>
-              <a:rPr lang="ru-BY" sz="2100" dirty="0" err="1">
-                <a:latin typeface="Times New Roman" panose="02020603050405020304" pitchFamily="18" charset="0"/>
-                <a:cs typeface="Times New Roman" panose="02020603050405020304" pitchFamily="18" charset="0"/>
-              </a:rPr>
-              <a:t>Esc</a:t>
-            </a:r>
-            <a:r>
-              <a:rPr lang="ru-BY" sz="2100" dirty="0">
-                <a:latin typeface="Times New Roman" panose="02020603050405020304" pitchFamily="18" charset="0"/>
-                <a:cs typeface="Times New Roman" panose="02020603050405020304" pitchFamily="18" charset="0"/>
-              </a:rPr>
-              <a:t>), обновление координат ракеток с учётом нажатых клавиш и границ поля, расчёт нового положения мяча согласно формулам движения, проверка столкновений с границами поля и ракетками, фиксация голов с обновлением счёта и возвратом мяча в центр, проверка достижения 11 очков для завершения игры, а также отрисовка кадра с использованием двойной буферизации для устранения мерцания. </a:t>
-            </a:r>
-            <a:endParaRPr lang="ru-RU" sz="2100" dirty="0">
-              <a:latin typeface="Times New Roman" panose="02020603050405020304" pitchFamily="18" charset="0"/>
-              <a:cs typeface="Times New Roman" panose="02020603050405020304" pitchFamily="18" charset="0"/>
-            </a:endParaRPr>
-          </a:p>
-          <a:p>
-            <a:pPr indent="363538"/>
-            <a:r>
-              <a:rPr lang="ru-BY" sz="2100" dirty="0">
-                <a:latin typeface="Times New Roman" panose="02020603050405020304" pitchFamily="18" charset="0"/>
-                <a:cs typeface="Times New Roman" panose="02020603050405020304" pitchFamily="18" charset="0"/>
-              </a:rPr>
-              <a:t>Циклическая структура алгоритма обеспечивает непрерывную работу игры до достижения одним из игроков победы, после чего отображается экран окончания матча с указанием победителя.</a:t>
-            </a:r>
+        </p:spPr>
+        <p:style>
+          <a:lnRef idx="2">
+            <a:schemeClr val="accent6"/>
+          </a:lnRef>
+          <a:fillRef idx="1">
+            <a:schemeClr val="lt1"/>
+          </a:fillRef>
+          <a:effectRef idx="0">
+            <a:schemeClr val="accent6"/>
+          </a:effectRef>
+          <a:fontRef idx="minor">
+            <a:schemeClr val="dk1"/>
+          </a:fontRef>
+        </p:style>
+        <p:txBody>
+          <a:bodyPr rtlCol="0" anchor="ctr"/>
+          <a:lstStyle/>
+          <a:p>
+            <a:pPr algn="ctr"/>
+            <a:endParaRPr lang="ru-BY"/>
           </a:p>
         </p:txBody>
       </p:sp>
       <p:pic>
         <p:nvPicPr>
-          <p:cNvPr id="5" name="Рисунок 4">
-            <a:extLst>
-              <a:ext uri="{FF2B5EF4-FFF2-40B4-BE49-F238E27FC236}">
-                <a16:creationId xmlns:a16="http://schemas.microsoft.com/office/drawing/2014/main" id="{ACD20F56-8D07-ED5D-351D-572B44BC4FDA}"/>
+          <p:cNvPr id="3" name="Рисунок 2">
+            <a:extLst>
+              <a:ext uri="{FF2B5EF4-FFF2-40B4-BE49-F238E27FC236}">
+                <a16:creationId xmlns:a16="http://schemas.microsoft.com/office/drawing/2014/main" id="{8784031C-3CFA-2B63-581D-1DB64316BEBC}"/>
               </a:ext>
             </a:extLst>
           </p:cNvPr>
@@ -4543,21 +4466,15 @@
           <p:nvPr/>
         </p:nvPicPr>
         <p:blipFill>
-          <a:blip r:embed="rId3">
-            <a:extLst>
-              <a:ext uri="{28A0092B-C50C-407E-A947-70E740481C1C}">
-                <a14:useLocalDpi xmlns:a14="http://schemas.microsoft.com/office/drawing/2010/main" val="0"/>
-              </a:ext>
-            </a:extLst>
-          </a:blip>
+          <a:blip r:embed="rId3"/>
           <a:stretch>
             <a:fillRect/>
           </a:stretch>
         </p:blipFill>
         <p:spPr>
           <a:xfrm>
-            <a:off x="8479907" y="0"/>
-            <a:ext cx="2921458" cy="6858000"/>
+            <a:off x="1610590" y="111374"/>
+            <a:ext cx="13248410" cy="6635252"/>
           </a:xfrm>
           <a:prstGeom prst="rect">
             <a:avLst/>
@@ -4567,7 +4484,7 @@
     </p:spTree>
     <p:extLst>
       <p:ext uri="{BB962C8B-B14F-4D97-AF65-F5344CB8AC3E}">
-        <p14:creationId xmlns:p14="http://schemas.microsoft.com/office/powerpoint/2010/main" val="4042661150"/>
+        <p14:creationId xmlns:p14="http://schemas.microsoft.com/office/powerpoint/2010/main" val="3068564765"/>
       </p:ext>
     </p:extLst>
   </p:cSld>
@@ -4646,10 +4563,10 @@
       </p:pic>
       <p:sp>
         <p:nvSpPr>
-          <p:cNvPr id="6" name="TextBox 5">
-            <a:extLst>
-              <a:ext uri="{FF2B5EF4-FFF2-40B4-BE49-F238E27FC236}">
-                <a16:creationId xmlns:a16="http://schemas.microsoft.com/office/drawing/2014/main" id="{62384299-23C2-40F9-7D08-8895DC3A6037}"/>
+          <p:cNvPr id="3" name="TextBox 2">
+            <a:extLst>
+              <a:ext uri="{FF2B5EF4-FFF2-40B4-BE49-F238E27FC236}">
+                <a16:creationId xmlns:a16="http://schemas.microsoft.com/office/drawing/2014/main" id="{CA22445E-20F1-518D-5738-760B4028219A}"/>
               </a:ext>
             </a:extLst>
           </p:cNvPr>
@@ -4658,8 +4575,8 @@
         </p:nvSpPr>
         <p:spPr>
           <a:xfrm>
-            <a:off x="192505" y="0"/>
-            <a:ext cx="6096000" cy="769441"/>
+            <a:off x="254468" y="84975"/>
+            <a:ext cx="4237522" cy="769441"/>
           </a:xfrm>
           <a:prstGeom prst="rect">
             <a:avLst/>
@@ -4682,7 +4599,7 @@
               <a:rPr lang="en-US" sz="4400" b="0" dirty="0">
                 <a:latin typeface="Bahnschrift SemiBold Condensed" panose="020B0502040204020203" pitchFamily="34" charset="0"/>
               </a:rPr>
-              <a:t>IDEF0</a:t>
+              <a:t>USE-CASE</a:t>
             </a:r>
             <a:endParaRPr lang="ru-RU" sz="4400" dirty="0">
               <a:latin typeface="Bahnschrift SemiBold Condensed" panose="020B0502040204020203" pitchFamily="34" charset="0"/>
@@ -4690,56 +4607,12 @@
           </a:p>
         </p:txBody>
       </p:sp>
-      <p:sp>
-        <p:nvSpPr>
-          <p:cNvPr id="4" name="Прямоугольник 3">
-            <a:extLst>
-              <a:ext uri="{FF2B5EF4-FFF2-40B4-BE49-F238E27FC236}">
-                <a16:creationId xmlns:a16="http://schemas.microsoft.com/office/drawing/2014/main" id="{8D52D455-7125-3DFD-63C9-E1B319BD9AA6}"/>
-              </a:ext>
-            </a:extLst>
-          </p:cNvPr>
-          <p:cNvSpPr/>
-          <p:nvPr/>
-        </p:nvSpPr>
-        <p:spPr>
-          <a:xfrm>
-            <a:off x="1932709" y="769441"/>
-            <a:ext cx="8416636" cy="5839177"/>
-          </a:xfrm>
-          <a:prstGeom prst="rect">
-            <a:avLst/>
-          </a:prstGeom>
-        </p:spPr>
-        <p:style>
-          <a:lnRef idx="2">
-            <a:schemeClr val="accent6"/>
-          </a:lnRef>
-          <a:fillRef idx="1">
-            <a:schemeClr val="lt1"/>
-          </a:fillRef>
-          <a:effectRef idx="0">
-            <a:schemeClr val="accent6"/>
-          </a:effectRef>
-          <a:fontRef idx="minor">
-            <a:schemeClr val="dk1"/>
-          </a:fontRef>
-        </p:style>
-        <p:txBody>
-          <a:bodyPr rtlCol="0" anchor="ctr"/>
-          <a:lstStyle/>
-          <a:p>
-            <a:pPr algn="ctr"/>
-            <a:endParaRPr lang="ru-BY"/>
-          </a:p>
-        </p:txBody>
-      </p:sp>
       <p:pic>
         <p:nvPicPr>
-          <p:cNvPr id="3" name="Рисунок 2">
-            <a:extLst>
-              <a:ext uri="{FF2B5EF4-FFF2-40B4-BE49-F238E27FC236}">
-                <a16:creationId xmlns:a16="http://schemas.microsoft.com/office/drawing/2014/main" id="{52F75B21-7F4D-1F5E-4E43-5789066623BC}"/>
+          <p:cNvPr id="5" name="Рисунок 4">
+            <a:extLst>
+              <a:ext uri="{FF2B5EF4-FFF2-40B4-BE49-F238E27FC236}">
+                <a16:creationId xmlns:a16="http://schemas.microsoft.com/office/drawing/2014/main" id="{07A44A3F-C3CC-0E14-26E7-506FE9458C60}"/>
               </a:ext>
             </a:extLst>
           </p:cNvPr>
@@ -4749,25 +4622,45 @@
           <p:nvPr/>
         </p:nvPicPr>
         <p:blipFill>
-          <a:blip r:embed="rId3"/>
+          <a:blip r:embed="rId3">
+            <a:extLst>
+              <a:ext uri="{28A0092B-C50C-407E-A947-70E740481C1C}">
+                <a14:useLocalDpi xmlns:a14="http://schemas.microsoft.com/office/drawing/2010/main" val="0"/>
+              </a:ext>
+            </a:extLst>
+          </a:blip>
           <a:stretch>
             <a:fillRect/>
           </a:stretch>
         </p:blipFill>
         <p:spPr>
           <a:xfrm>
-            <a:off x="1620982" y="604517"/>
-            <a:ext cx="12192000" cy="6106166"/>
+            <a:off x="2156138" y="854416"/>
+            <a:ext cx="8442589" cy="5807530"/>
           </a:xfrm>
           <a:prstGeom prst="rect">
             <a:avLst/>
           </a:prstGeom>
+          <a:ln w="38100" cap="sq">
+            <a:solidFill>
+              <a:srgbClr val="000000"/>
+            </a:solidFill>
+            <a:prstDash val="solid"/>
+            <a:miter lim="800000"/>
+          </a:ln>
+          <a:effectLst>
+            <a:outerShdw blurRad="50800" dist="38100" dir="2700000" algn="tl" rotWithShape="0">
+              <a:srgbClr val="000000">
+                <a:alpha val="43000"/>
+              </a:srgbClr>
+            </a:outerShdw>
+          </a:effectLst>
         </p:spPr>
       </p:pic>
     </p:spTree>
     <p:extLst>
       <p:ext uri="{BB962C8B-B14F-4D97-AF65-F5344CB8AC3E}">
-        <p14:creationId xmlns:p14="http://schemas.microsoft.com/office/powerpoint/2010/main" val="3329932431"/>
+        <p14:creationId xmlns:p14="http://schemas.microsoft.com/office/powerpoint/2010/main" val="478815932"/>
       </p:ext>
     </p:extLst>
   </p:cSld>
@@ -4846,336 +4739,6 @@
       </p:pic>
       <p:sp>
         <p:nvSpPr>
-          <p:cNvPr id="5" name="Прямоугольник 4">
-            <a:extLst>
-              <a:ext uri="{FF2B5EF4-FFF2-40B4-BE49-F238E27FC236}">
-                <a16:creationId xmlns:a16="http://schemas.microsoft.com/office/drawing/2014/main" id="{A11DEBCD-3A3A-8744-AE62-3FE304EDE3EE}"/>
-              </a:ext>
-            </a:extLst>
-          </p:cNvPr>
-          <p:cNvSpPr/>
-          <p:nvPr/>
-        </p:nvSpPr>
-        <p:spPr>
-          <a:xfrm>
-            <a:off x="1558636" y="301336"/>
-            <a:ext cx="9112828" cy="6307282"/>
-          </a:xfrm>
-          <a:prstGeom prst="rect">
-            <a:avLst/>
-          </a:prstGeom>
-        </p:spPr>
-        <p:style>
-          <a:lnRef idx="2">
-            <a:schemeClr val="accent6"/>
-          </a:lnRef>
-          <a:fillRef idx="1">
-            <a:schemeClr val="lt1"/>
-          </a:fillRef>
-          <a:effectRef idx="0">
-            <a:schemeClr val="accent6"/>
-          </a:effectRef>
-          <a:fontRef idx="minor">
-            <a:schemeClr val="dk1"/>
-          </a:fontRef>
-        </p:style>
-        <p:txBody>
-          <a:bodyPr rtlCol="0" anchor="ctr"/>
-          <a:lstStyle/>
-          <a:p>
-            <a:pPr algn="ctr"/>
-            <a:endParaRPr lang="ru-BY"/>
-          </a:p>
-        </p:txBody>
-      </p:sp>
-      <p:pic>
-        <p:nvPicPr>
-          <p:cNvPr id="3" name="Рисунок 2">
-            <a:extLst>
-              <a:ext uri="{FF2B5EF4-FFF2-40B4-BE49-F238E27FC236}">
-                <a16:creationId xmlns:a16="http://schemas.microsoft.com/office/drawing/2014/main" id="{8784031C-3CFA-2B63-581D-1DB64316BEBC}"/>
-              </a:ext>
-            </a:extLst>
-          </p:cNvPr>
-          <p:cNvPicPr>
-            <a:picLocks noChangeAspect="1"/>
-          </p:cNvPicPr>
-          <p:nvPr/>
-        </p:nvPicPr>
-        <p:blipFill>
-          <a:blip r:embed="rId3"/>
-          <a:stretch>
-            <a:fillRect/>
-          </a:stretch>
-        </p:blipFill>
-        <p:spPr>
-          <a:xfrm>
-            <a:off x="1610590" y="111374"/>
-            <a:ext cx="13248410" cy="6635252"/>
-          </a:xfrm>
-          <a:prstGeom prst="rect">
-            <a:avLst/>
-          </a:prstGeom>
-        </p:spPr>
-      </p:pic>
-    </p:spTree>
-    <p:extLst>
-      <p:ext uri="{BB962C8B-B14F-4D97-AF65-F5344CB8AC3E}">
-        <p14:creationId xmlns:p14="http://schemas.microsoft.com/office/powerpoint/2010/main" val="3068564765"/>
-      </p:ext>
-    </p:extLst>
-  </p:cSld>
-  <p:clrMapOvr>
-    <a:masterClrMapping/>
-  </p:clrMapOvr>
-  <p:transition spd="slow">
-    <p:push dir="u"/>
-  </p:transition>
-</p:sld>
-</file>
-
-<file path=ppt/slides/slide13.xml><?xml version="1.0" encoding="utf-8"?>
-<p:sld xmlns:a="http://schemas.openxmlformats.org/drawingml/2006/main" xmlns:r="http://schemas.openxmlformats.org/officeDocument/2006/relationships" xmlns:p="http://schemas.openxmlformats.org/presentationml/2006/main">
-  <p:cSld>
-    <p:spTree>
-      <p:nvGrpSpPr>
-        <p:cNvPr id="1" name=""/>
-        <p:cNvGrpSpPr/>
-        <p:nvPr/>
-      </p:nvGrpSpPr>
-      <p:grpSpPr>
-        <a:xfrm>
-          <a:off x="0" y="0"/>
-          <a:ext cx="0" cy="0"/>
-          <a:chOff x="0" y="0"/>
-          <a:chExt cx="0" cy="0"/>
-        </a:xfrm>
-      </p:grpSpPr>
-      <p:pic>
-        <p:nvPicPr>
-          <p:cNvPr id="6146" name="Picture 2" descr="Picture background">
-            <a:extLst>
-              <a:ext uri="{FF2B5EF4-FFF2-40B4-BE49-F238E27FC236}">
-                <a16:creationId xmlns:a16="http://schemas.microsoft.com/office/drawing/2014/main" id="{225C1529-B3DA-3984-055D-6C6612B977C2}"/>
-              </a:ext>
-            </a:extLst>
-          </p:cNvPr>
-          <p:cNvPicPr>
-            <a:picLocks noChangeAspect="1" noChangeArrowheads="1"/>
-          </p:cNvPicPr>
-          <p:nvPr/>
-        </p:nvPicPr>
-        <p:blipFill>
-          <a:blip r:embed="rId2">
-            <a:extLst>
-              <a:ext uri="{28A0092B-C50C-407E-A947-70E740481C1C}">
-                <a14:useLocalDpi xmlns:a14="http://schemas.microsoft.com/office/drawing/2010/main" val="0"/>
-              </a:ext>
-            </a:extLst>
-          </a:blip>
-          <a:srcRect/>
-          <a:stretch>
-            <a:fillRect/>
-          </a:stretch>
-        </p:blipFill>
-        <p:spPr bwMode="auto">
-          <a:xfrm>
-            <a:off x="0" y="0"/>
-            <a:ext cx="12192000" cy="6858000"/>
-          </a:xfrm>
-          <a:prstGeom prst="rect">
-            <a:avLst/>
-          </a:prstGeom>
-          <a:noFill/>
-          <a:extLst>
-            <a:ext uri="{909E8E84-426E-40DD-AFC4-6F175D3DCCD1}">
-              <a14:hiddenFill xmlns:a14="http://schemas.microsoft.com/office/drawing/2010/main">
-                <a:solidFill>
-                  <a:srgbClr val="FFFFFF"/>
-                </a:solidFill>
-              </a14:hiddenFill>
-            </a:ext>
-          </a:extLst>
-        </p:spPr>
-      </p:pic>
-      <p:sp>
-        <p:nvSpPr>
-          <p:cNvPr id="3" name="TextBox 2">
-            <a:extLst>
-              <a:ext uri="{FF2B5EF4-FFF2-40B4-BE49-F238E27FC236}">
-                <a16:creationId xmlns:a16="http://schemas.microsoft.com/office/drawing/2014/main" id="{CA22445E-20F1-518D-5738-760B4028219A}"/>
-              </a:ext>
-            </a:extLst>
-          </p:cNvPr>
-          <p:cNvSpPr txBox="1"/>
-          <p:nvPr/>
-        </p:nvSpPr>
-        <p:spPr>
-          <a:xfrm>
-            <a:off x="254468" y="84975"/>
-            <a:ext cx="4237522" cy="769441"/>
-          </a:xfrm>
-          <a:prstGeom prst="rect">
-            <a:avLst/>
-          </a:prstGeom>
-          <a:noFill/>
-        </p:spPr>
-        <p:txBody>
-          <a:bodyPr wrap="square">
-            <a:spAutoFit/>
-          </a:bodyPr>
-          <a:lstStyle/>
-          <a:p>
-            <a:r>
-              <a:rPr lang="ru-RU" sz="4400" b="0" dirty="0">
-                <a:latin typeface="Bahnschrift SemiBold Condensed" panose="020B0502040204020203" pitchFamily="34" charset="0"/>
-              </a:rPr>
-              <a:t>Диаграмма </a:t>
-            </a:r>
-            <a:r>
-              <a:rPr lang="en-US" sz="4400" b="0" dirty="0">
-                <a:latin typeface="Bahnschrift SemiBold Condensed" panose="020B0502040204020203" pitchFamily="34" charset="0"/>
-              </a:rPr>
-              <a:t>USE-CASE</a:t>
-            </a:r>
-            <a:endParaRPr lang="ru-RU" sz="4400" dirty="0">
-              <a:latin typeface="Bahnschrift SemiBold Condensed" panose="020B0502040204020203" pitchFamily="34" charset="0"/>
-            </a:endParaRPr>
-          </a:p>
-        </p:txBody>
-      </p:sp>
-      <p:pic>
-        <p:nvPicPr>
-          <p:cNvPr id="5" name="Рисунок 4">
-            <a:extLst>
-              <a:ext uri="{FF2B5EF4-FFF2-40B4-BE49-F238E27FC236}">
-                <a16:creationId xmlns:a16="http://schemas.microsoft.com/office/drawing/2014/main" id="{07A44A3F-C3CC-0E14-26E7-506FE9458C60}"/>
-              </a:ext>
-            </a:extLst>
-          </p:cNvPr>
-          <p:cNvPicPr>
-            <a:picLocks noChangeAspect="1"/>
-          </p:cNvPicPr>
-          <p:nvPr/>
-        </p:nvPicPr>
-        <p:blipFill>
-          <a:blip r:embed="rId3">
-            <a:extLst>
-              <a:ext uri="{28A0092B-C50C-407E-A947-70E740481C1C}">
-                <a14:useLocalDpi xmlns:a14="http://schemas.microsoft.com/office/drawing/2010/main" val="0"/>
-              </a:ext>
-            </a:extLst>
-          </a:blip>
-          <a:stretch>
-            <a:fillRect/>
-          </a:stretch>
-        </p:blipFill>
-        <p:spPr>
-          <a:xfrm>
-            <a:off x="2156138" y="854416"/>
-            <a:ext cx="8442589" cy="5807530"/>
-          </a:xfrm>
-          <a:prstGeom prst="rect">
-            <a:avLst/>
-          </a:prstGeom>
-          <a:ln w="38100" cap="sq">
-            <a:solidFill>
-              <a:srgbClr val="000000"/>
-            </a:solidFill>
-            <a:prstDash val="solid"/>
-            <a:miter lim="800000"/>
-          </a:ln>
-          <a:effectLst>
-            <a:outerShdw blurRad="50800" dist="38100" dir="2700000" algn="tl" rotWithShape="0">
-              <a:srgbClr val="000000">
-                <a:alpha val="43000"/>
-              </a:srgbClr>
-            </a:outerShdw>
-          </a:effectLst>
-        </p:spPr>
-      </p:pic>
-    </p:spTree>
-    <p:extLst>
-      <p:ext uri="{BB962C8B-B14F-4D97-AF65-F5344CB8AC3E}">
-        <p14:creationId xmlns:p14="http://schemas.microsoft.com/office/powerpoint/2010/main" val="478815932"/>
-      </p:ext>
-    </p:extLst>
-  </p:cSld>
-  <p:clrMapOvr>
-    <a:masterClrMapping/>
-  </p:clrMapOvr>
-  <p:transition spd="slow">
-    <p:push dir="u"/>
-  </p:transition>
-</p:sld>
-</file>
-
-<file path=ppt/slides/slide14.xml><?xml version="1.0" encoding="utf-8"?>
-<p:sld xmlns:a="http://schemas.openxmlformats.org/drawingml/2006/main" xmlns:r="http://schemas.openxmlformats.org/officeDocument/2006/relationships" xmlns:p="http://schemas.openxmlformats.org/presentationml/2006/main">
-  <p:cSld>
-    <p:spTree>
-      <p:nvGrpSpPr>
-        <p:cNvPr id="1" name=""/>
-        <p:cNvGrpSpPr/>
-        <p:nvPr/>
-      </p:nvGrpSpPr>
-      <p:grpSpPr>
-        <a:xfrm>
-          <a:off x="0" y="0"/>
-          <a:ext cx="0" cy="0"/>
-          <a:chOff x="0" y="0"/>
-          <a:chExt cx="0" cy="0"/>
-        </a:xfrm>
-      </p:grpSpPr>
-      <p:pic>
-        <p:nvPicPr>
-          <p:cNvPr id="6146" name="Picture 2" descr="Picture background">
-            <a:extLst>
-              <a:ext uri="{FF2B5EF4-FFF2-40B4-BE49-F238E27FC236}">
-                <a16:creationId xmlns:a16="http://schemas.microsoft.com/office/drawing/2014/main" id="{225C1529-B3DA-3984-055D-6C6612B977C2}"/>
-              </a:ext>
-            </a:extLst>
-          </p:cNvPr>
-          <p:cNvPicPr>
-            <a:picLocks noChangeAspect="1" noChangeArrowheads="1"/>
-          </p:cNvPicPr>
-          <p:nvPr/>
-        </p:nvPicPr>
-        <p:blipFill>
-          <a:blip r:embed="rId2">
-            <a:extLst>
-              <a:ext uri="{28A0092B-C50C-407E-A947-70E740481C1C}">
-                <a14:useLocalDpi xmlns:a14="http://schemas.microsoft.com/office/drawing/2010/main" val="0"/>
-              </a:ext>
-            </a:extLst>
-          </a:blip>
-          <a:srcRect/>
-          <a:stretch>
-            <a:fillRect/>
-          </a:stretch>
-        </p:blipFill>
-        <p:spPr bwMode="auto">
-          <a:xfrm>
-            <a:off x="0" y="0"/>
-            <a:ext cx="12192000" cy="6858000"/>
-          </a:xfrm>
-          <a:prstGeom prst="rect">
-            <a:avLst/>
-          </a:prstGeom>
-          <a:noFill/>
-          <a:extLst>
-            <a:ext uri="{909E8E84-426E-40DD-AFC4-6F175D3DCCD1}">
-              <a14:hiddenFill xmlns:a14="http://schemas.microsoft.com/office/drawing/2010/main">
-                <a:solidFill>
-                  <a:srgbClr val="FFFFFF"/>
-                </a:solidFill>
-              </a14:hiddenFill>
-            </a:ext>
-          </a:extLst>
-        </p:spPr>
-      </p:pic>
-      <p:sp>
-        <p:nvSpPr>
           <p:cNvPr id="3" name="TextBox 2">
             <a:extLst>
               <a:ext uri="{FF2B5EF4-FFF2-40B4-BE49-F238E27FC236}">
@@ -5387,416 +4950,6 @@
   <p:transition spd="slow">
     <p:push dir="u"/>
   </p:transition>
-</p:sld>
-</file>
-
-<file path=ppt/slides/slide15.xml><?xml version="1.0" encoding="utf-8"?>
-<p:sld xmlns:a="http://schemas.openxmlformats.org/drawingml/2006/main" xmlns:r="http://schemas.openxmlformats.org/officeDocument/2006/relationships" xmlns:p="http://schemas.openxmlformats.org/presentationml/2006/main">
-  <p:cSld>
-    <p:spTree>
-      <p:nvGrpSpPr>
-        <p:cNvPr id="1" name=""/>
-        <p:cNvGrpSpPr/>
-        <p:nvPr/>
-      </p:nvGrpSpPr>
-      <p:grpSpPr>
-        <a:xfrm>
-          <a:off x="0" y="0"/>
-          <a:ext cx="0" cy="0"/>
-          <a:chOff x="0" y="0"/>
-          <a:chExt cx="0" cy="0"/>
-        </a:xfrm>
-      </p:grpSpPr>
-      <p:pic>
-        <p:nvPicPr>
-          <p:cNvPr id="6146" name="Picture 2" descr="Picture background">
-            <a:extLst>
-              <a:ext uri="{FF2B5EF4-FFF2-40B4-BE49-F238E27FC236}">
-                <a16:creationId xmlns:a16="http://schemas.microsoft.com/office/drawing/2014/main" id="{225C1529-B3DA-3984-055D-6C6612B977C2}"/>
-              </a:ext>
-            </a:extLst>
-          </p:cNvPr>
-          <p:cNvPicPr>
-            <a:picLocks noChangeAspect="1" noChangeArrowheads="1"/>
-          </p:cNvPicPr>
-          <p:nvPr/>
-        </p:nvPicPr>
-        <p:blipFill>
-          <a:blip r:embed="rId2">
-            <a:extLst>
-              <a:ext uri="{28A0092B-C50C-407E-A947-70E740481C1C}">
-                <a14:useLocalDpi xmlns:a14="http://schemas.microsoft.com/office/drawing/2010/main" val="0"/>
-              </a:ext>
-            </a:extLst>
-          </a:blip>
-          <a:srcRect/>
-          <a:stretch>
-            <a:fillRect/>
-          </a:stretch>
-        </p:blipFill>
-        <p:spPr bwMode="auto">
-          <a:xfrm>
-            <a:off x="0" y="0"/>
-            <a:ext cx="12192000" cy="6858000"/>
-          </a:xfrm>
-          <a:prstGeom prst="rect">
-            <a:avLst/>
-          </a:prstGeom>
-          <a:noFill/>
-          <a:extLst>
-            <a:ext uri="{909E8E84-426E-40DD-AFC4-6F175D3DCCD1}">
-              <a14:hiddenFill xmlns:a14="http://schemas.microsoft.com/office/drawing/2010/main">
-                <a:solidFill>
-                  <a:srgbClr val="FFFFFF"/>
-                </a:solidFill>
-              </a14:hiddenFill>
-            </a:ext>
-          </a:extLst>
-        </p:spPr>
-      </p:pic>
-      <p:sp>
-        <p:nvSpPr>
-          <p:cNvPr id="3" name="TextBox 2">
-            <a:extLst>
-              <a:ext uri="{FF2B5EF4-FFF2-40B4-BE49-F238E27FC236}">
-                <a16:creationId xmlns:a16="http://schemas.microsoft.com/office/drawing/2014/main" id="{4C833D46-B8DB-BAB6-ADF0-1538E5FC65F7}"/>
-              </a:ext>
-            </a:extLst>
-          </p:cNvPr>
-          <p:cNvSpPr txBox="1"/>
-          <p:nvPr/>
-        </p:nvSpPr>
-        <p:spPr>
-          <a:xfrm>
-            <a:off x="852227" y="2967335"/>
-            <a:ext cx="10487545" cy="923330"/>
-          </a:xfrm>
-          <a:prstGeom prst="rect">
-            <a:avLst/>
-          </a:prstGeom>
-          <a:noFill/>
-        </p:spPr>
-        <p:txBody>
-          <a:bodyPr wrap="square">
-            <a:spAutoFit/>
-          </a:bodyPr>
-          <a:lstStyle/>
-          <a:p>
-            <a:r>
-              <a:rPr lang="ru-RU" sz="5400" b="0" dirty="0">
-                <a:latin typeface="Bahnschrift SemiBold Condensed" panose="020B0502040204020203" pitchFamily="34" charset="0"/>
-              </a:rPr>
-              <a:t>Демонстрация разработанного приложения</a:t>
-            </a:r>
-            <a:endParaRPr lang="ru-RU" sz="5400" dirty="0">
-              <a:latin typeface="Bahnschrift SemiBold Condensed" panose="020B0502040204020203" pitchFamily="34" charset="0"/>
-            </a:endParaRPr>
-          </a:p>
-        </p:txBody>
-      </p:sp>
-      <p:pic>
-        <p:nvPicPr>
-          <p:cNvPr id="4" name="Рисунок 3">
-            <a:extLst>
-              <a:ext uri="{FF2B5EF4-FFF2-40B4-BE49-F238E27FC236}">
-                <a16:creationId xmlns:a16="http://schemas.microsoft.com/office/drawing/2014/main" id="{D0AE7BB8-1EF2-A65C-E1BD-A70DCE983B6D}"/>
-              </a:ext>
-            </a:extLst>
-          </p:cNvPr>
-          <p:cNvPicPr>
-            <a:picLocks noChangeAspect="1"/>
-          </p:cNvPicPr>
-          <p:nvPr/>
-        </p:nvPicPr>
-        <p:blipFill>
-          <a:blip r:embed="rId3">
-            <a:extLst>
-              <a:ext uri="{28A0092B-C50C-407E-A947-70E740481C1C}">
-                <a14:useLocalDpi xmlns:a14="http://schemas.microsoft.com/office/drawing/2010/main" val="0"/>
-              </a:ext>
-            </a:extLst>
-          </a:blip>
-          <a:stretch>
-            <a:fillRect/>
-          </a:stretch>
-        </p:blipFill>
-        <p:spPr>
-          <a:xfrm>
-            <a:off x="4869787" y="4160740"/>
-            <a:ext cx="2452423" cy="2427184"/>
-          </a:xfrm>
-          <a:prstGeom prst="ellipse">
-            <a:avLst/>
-          </a:prstGeom>
-          <a:ln>
-            <a:noFill/>
-          </a:ln>
-          <a:effectLst>
-            <a:softEdge rad="112500"/>
-          </a:effectLst>
-        </p:spPr>
-      </p:pic>
-    </p:spTree>
-    <p:extLst>
-      <p:ext uri="{BB962C8B-B14F-4D97-AF65-F5344CB8AC3E}">
-        <p14:creationId xmlns:p14="http://schemas.microsoft.com/office/powerpoint/2010/main" val="313926714"/>
-      </p:ext>
-    </p:extLst>
-  </p:cSld>
-  <p:clrMapOvr>
-    <a:masterClrMapping/>
-  </p:clrMapOvr>
-  <p:transition spd="slow">
-    <p:push dir="u"/>
-  </p:transition>
-</p:sld>
-</file>
-
-<file path=ppt/slides/slide16.xml><?xml version="1.0" encoding="utf-8"?>
-<p:sld xmlns:a="http://schemas.openxmlformats.org/drawingml/2006/main" xmlns:r="http://schemas.openxmlformats.org/officeDocument/2006/relationships" xmlns:p="http://schemas.openxmlformats.org/presentationml/2006/main">
-  <p:cSld>
-    <p:spTree>
-      <p:nvGrpSpPr>
-        <p:cNvPr id="1" name=""/>
-        <p:cNvGrpSpPr/>
-        <p:nvPr/>
-      </p:nvGrpSpPr>
-      <p:grpSpPr>
-        <a:xfrm>
-          <a:off x="0" y="0"/>
-          <a:ext cx="0" cy="0"/>
-          <a:chOff x="0" y="0"/>
-          <a:chExt cx="0" cy="0"/>
-        </a:xfrm>
-      </p:grpSpPr>
-      <p:pic>
-        <p:nvPicPr>
-          <p:cNvPr id="6146" name="Picture 2" descr="Picture background">
-            <a:extLst>
-              <a:ext uri="{FF2B5EF4-FFF2-40B4-BE49-F238E27FC236}">
-                <a16:creationId xmlns:a16="http://schemas.microsoft.com/office/drawing/2014/main" id="{225C1529-B3DA-3984-055D-6C6612B977C2}"/>
-              </a:ext>
-            </a:extLst>
-          </p:cNvPr>
-          <p:cNvPicPr>
-            <a:picLocks noChangeAspect="1" noChangeArrowheads="1"/>
-          </p:cNvPicPr>
-          <p:nvPr/>
-        </p:nvPicPr>
-        <p:blipFill>
-          <a:blip r:embed="rId2">
-            <a:extLst>
-              <a:ext uri="{28A0092B-C50C-407E-A947-70E740481C1C}">
-                <a14:useLocalDpi xmlns:a14="http://schemas.microsoft.com/office/drawing/2010/main" val="0"/>
-              </a:ext>
-            </a:extLst>
-          </a:blip>
-          <a:srcRect/>
-          <a:stretch>
-            <a:fillRect/>
-          </a:stretch>
-        </p:blipFill>
-        <p:spPr bwMode="auto">
-          <a:xfrm>
-            <a:off x="0" y="0"/>
-            <a:ext cx="12192000" cy="6858000"/>
-          </a:xfrm>
-          <a:prstGeom prst="rect">
-            <a:avLst/>
-          </a:prstGeom>
-          <a:noFill/>
-          <a:extLst>
-            <a:ext uri="{909E8E84-426E-40DD-AFC4-6F175D3DCCD1}">
-              <a14:hiddenFill xmlns:a14="http://schemas.microsoft.com/office/drawing/2010/main">
-                <a:solidFill>
-                  <a:srgbClr val="FFFFFF"/>
-                </a:solidFill>
-              </a14:hiddenFill>
-            </a:ext>
-          </a:extLst>
-        </p:spPr>
-      </p:pic>
-      <p:sp>
-        <p:nvSpPr>
-          <p:cNvPr id="3" name="TextBox 2">
-            <a:extLst>
-              <a:ext uri="{FF2B5EF4-FFF2-40B4-BE49-F238E27FC236}">
-                <a16:creationId xmlns:a16="http://schemas.microsoft.com/office/drawing/2014/main" id="{0027584E-28CD-624E-E47D-977015E511ED}"/>
-              </a:ext>
-            </a:extLst>
-          </p:cNvPr>
-          <p:cNvSpPr txBox="1"/>
-          <p:nvPr/>
-        </p:nvSpPr>
-        <p:spPr>
-          <a:xfrm>
-            <a:off x="2596806" y="2786519"/>
-            <a:ext cx="6998387" cy="1200329"/>
-          </a:xfrm>
-          <a:prstGeom prst="rect">
-            <a:avLst/>
-          </a:prstGeom>
-          <a:noFill/>
-        </p:spPr>
-        <p:txBody>
-          <a:bodyPr wrap="square">
-            <a:spAutoFit/>
-          </a:bodyPr>
-          <a:lstStyle/>
-          <a:p>
-            <a:r>
-              <a:rPr lang="ru-RU" sz="7200" b="0" dirty="0">
-                <a:latin typeface="Bahnschrift SemiBold Condensed" panose="020B0502040204020203" pitchFamily="34" charset="0"/>
-              </a:rPr>
-              <a:t>Спасибо за внимание!</a:t>
-            </a:r>
-            <a:endParaRPr lang="ru-RU" sz="7200" dirty="0">
-              <a:latin typeface="Bahnschrift SemiBold Condensed" panose="020B0502040204020203" pitchFamily="34" charset="0"/>
-            </a:endParaRPr>
-          </a:p>
-        </p:txBody>
-      </p:sp>
-      <p:pic>
-        <p:nvPicPr>
-          <p:cNvPr id="4" name="Рисунок 3">
-            <a:extLst>
-              <a:ext uri="{FF2B5EF4-FFF2-40B4-BE49-F238E27FC236}">
-                <a16:creationId xmlns:a16="http://schemas.microsoft.com/office/drawing/2014/main" id="{D924EF06-274E-F585-BDB2-5B1BBF2A78D3}"/>
-              </a:ext>
-            </a:extLst>
-          </p:cNvPr>
-          <p:cNvPicPr>
-            <a:picLocks noChangeAspect="1"/>
-          </p:cNvPicPr>
-          <p:nvPr/>
-        </p:nvPicPr>
-        <p:blipFill>
-          <a:blip r:embed="rId3">
-            <a:extLst>
-              <a:ext uri="{28A0092B-C50C-407E-A947-70E740481C1C}">
-                <a14:useLocalDpi xmlns:a14="http://schemas.microsoft.com/office/drawing/2010/main" val="0"/>
-              </a:ext>
-            </a:extLst>
-          </a:blip>
-          <a:stretch>
-            <a:fillRect/>
-          </a:stretch>
-        </p:blipFill>
-        <p:spPr>
-          <a:xfrm>
-            <a:off x="9410616" y="4208832"/>
-            <a:ext cx="2452423" cy="2427184"/>
-          </a:xfrm>
-          <a:prstGeom prst="ellipse">
-            <a:avLst/>
-          </a:prstGeom>
-          <a:ln>
-            <a:noFill/>
-          </a:ln>
-          <a:effectLst>
-            <a:softEdge rad="112500"/>
-          </a:effectLst>
-        </p:spPr>
-      </p:pic>
-    </p:spTree>
-    <p:extLst>
-      <p:ext uri="{BB962C8B-B14F-4D97-AF65-F5344CB8AC3E}">
-        <p14:creationId xmlns:p14="http://schemas.microsoft.com/office/powerpoint/2010/main" val="2604332431"/>
-      </p:ext>
-    </p:extLst>
-  </p:cSld>
-  <p:clrMapOvr>
-    <a:masterClrMapping/>
-  </p:clrMapOvr>
-  <p:transition spd="slow">
-    <p:push dir="u"/>
-  </p:transition>
-  <p:timing>
-    <p:tnLst>
-      <p:par>
-        <p:cTn id="1" dur="indefinite" restart="never" nodeType="tmRoot">
-          <p:childTnLst>
-            <p:seq concurrent="1" nextAc="seek">
-              <p:cTn id="2" dur="indefinite" nodeType="mainSeq">
-                <p:childTnLst>
-                  <p:par>
-                    <p:cTn id="3" fill="hold">
-                      <p:stCondLst>
-                        <p:cond delay="indefinite"/>
-                      </p:stCondLst>
-                      <p:childTnLst>
-                        <p:par>
-                          <p:cTn id="4" fill="hold">
-                            <p:stCondLst>
-                              <p:cond delay="0"/>
-                            </p:stCondLst>
-                            <p:childTnLst>
-                              <p:par>
-                                <p:cTn id="5" presetID="16" presetClass="entr" presetSubtype="21" fill="hold" grpId="0" nodeType="clickEffect">
-                                  <p:stCondLst>
-                                    <p:cond delay="0"/>
-                                  </p:stCondLst>
-                                  <p:childTnLst>
-                                    <p:set>
-                                      <p:cBhvr>
-                                        <p:cTn id="6" dur="1" fill="hold">
-                                          <p:stCondLst>
-                                            <p:cond delay="0"/>
-                                          </p:stCondLst>
-                                        </p:cTn>
-                                        <p:tgtEl>
-                                          <p:spTgt spid="3"/>
-                                        </p:tgtEl>
-                                        <p:attrNameLst>
-                                          <p:attrName>style.visibility</p:attrName>
-                                        </p:attrNameLst>
-                                      </p:cBhvr>
-                                      <p:to>
-                                        <p:strVal val="visible"/>
-                                      </p:to>
-                                    </p:set>
-                                    <p:animEffect transition="in" filter="barn(inVertical)">
-                                      <p:cBhvr>
-                                        <p:cTn id="7" dur="500"/>
-                                        <p:tgtEl>
-                                          <p:spTgt spid="3"/>
-                                        </p:tgtEl>
-                                      </p:cBhvr>
-                                    </p:animEffect>
-                                  </p:childTnLst>
-                                </p:cTn>
-                              </p:par>
-                            </p:childTnLst>
-                          </p:cTn>
-                        </p:par>
-                      </p:childTnLst>
-                    </p:cTn>
-                  </p:par>
-                </p:childTnLst>
-              </p:cTn>
-              <p:prevCondLst>
-                <p:cond evt="onPrev" delay="0">
-                  <p:tgtEl>
-                    <p:sldTgt/>
-                  </p:tgtEl>
-                </p:cond>
-              </p:prevCondLst>
-              <p:nextCondLst>
-                <p:cond evt="onNext" delay="0">
-                  <p:tgtEl>
-                    <p:sldTgt/>
-                  </p:tgtEl>
-                </p:cond>
-              </p:nextCondLst>
-            </p:seq>
-          </p:childTnLst>
-        </p:cTn>
-      </p:par>
-    </p:tnLst>
-    <p:bldLst>
-      <p:bldP spid="3" grpId="0"/>
-    </p:bldLst>
-  </p:timing>
 </p:sld>
 </file>
 
@@ -5819,10 +4972,10 @@
       </p:grpSpPr>
       <p:pic>
         <p:nvPicPr>
-          <p:cNvPr id="2052" name="Picture 4" descr="Picture background">
-            <a:extLst>
-              <a:ext uri="{FF2B5EF4-FFF2-40B4-BE49-F238E27FC236}">
-                <a16:creationId xmlns:a16="http://schemas.microsoft.com/office/drawing/2014/main" id="{26E0D744-7338-F77E-A830-4EA71BEC1CEF}"/>
+          <p:cNvPr id="3074" name="Picture 2" descr="Picture background">
+            <a:extLst>
+              <a:ext uri="{FF2B5EF4-FFF2-40B4-BE49-F238E27FC236}">
+                <a16:creationId xmlns:a16="http://schemas.microsoft.com/office/drawing/2014/main" id="{12C99207-3147-FC0E-661E-B27785B69D82}"/>
               </a:ext>
             </a:extLst>
           </p:cNvPr>
@@ -5866,10 +5019,10 @@
       </p:pic>
       <p:sp>
         <p:nvSpPr>
-          <p:cNvPr id="5" name="TextBox 4">
-            <a:extLst>
-              <a:ext uri="{FF2B5EF4-FFF2-40B4-BE49-F238E27FC236}">
-                <a16:creationId xmlns:a16="http://schemas.microsoft.com/office/drawing/2014/main" id="{16EE33F0-27A7-2DC5-A824-BE6163312B11}"/>
+          <p:cNvPr id="6" name="TextBox 5">
+            <a:extLst>
+              <a:ext uri="{FF2B5EF4-FFF2-40B4-BE49-F238E27FC236}">
+                <a16:creationId xmlns:a16="http://schemas.microsoft.com/office/drawing/2014/main" id="{96BE92EB-BB7A-69FA-3276-B95BE063F8B5}"/>
               </a:ext>
             </a:extLst>
           </p:cNvPr>
@@ -5878,8 +5031,8 @@
         </p:nvSpPr>
         <p:spPr>
           <a:xfrm>
-            <a:off x="4197531" y="2659559"/>
-            <a:ext cx="4005943" cy="769441"/>
+            <a:off x="312821" y="237292"/>
+            <a:ext cx="6096000" cy="769441"/>
           </a:xfrm>
           <a:prstGeom prst="rect">
             <a:avLst/>
@@ -5893,23 +5046,186 @@
           <a:lstStyle/>
           <a:p>
             <a:r>
-              <a:rPr lang="ru-RU" sz="4400" b="0" dirty="0">
+              <a:rPr lang="ru-RU" sz="4400" dirty="0">
                 <a:latin typeface="Bahnschrift SemiBold Condensed" panose="020B0502040204020203" pitchFamily="34" charset="0"/>
               </a:rPr>
-              <a:t>Постановка задачи</a:t>
-            </a:r>
-            <a:endParaRPr lang="ru-RU" sz="4400" dirty="0">
-              <a:latin typeface="Bahnschrift SemiBold Condensed" panose="020B0502040204020203" pitchFamily="34" charset="0"/>
-            </a:endParaRPr>
+              <a:t>Цель</a:t>
+            </a:r>
+          </a:p>
+        </p:txBody>
+      </p:sp>
+      <p:sp>
+        <p:nvSpPr>
+          <p:cNvPr id="8" name="TextBox 7">
+            <a:extLst>
+              <a:ext uri="{FF2B5EF4-FFF2-40B4-BE49-F238E27FC236}">
+                <a16:creationId xmlns:a16="http://schemas.microsoft.com/office/drawing/2014/main" id="{C69D731B-DB0B-7F16-4356-C1723E8D66C6}"/>
+              </a:ext>
+            </a:extLst>
+          </p:cNvPr>
+          <p:cNvSpPr txBox="1"/>
+          <p:nvPr/>
+        </p:nvSpPr>
+        <p:spPr>
+          <a:xfrm>
+            <a:off x="312821" y="859304"/>
+            <a:ext cx="6208294" cy="769441"/>
+          </a:xfrm>
+          <a:prstGeom prst="rect">
+            <a:avLst/>
+          </a:prstGeom>
+          <a:noFill/>
+        </p:spPr>
+        <p:txBody>
+          <a:bodyPr wrap="square">
+            <a:spAutoFit/>
+          </a:bodyPr>
+          <a:lstStyle/>
+          <a:p>
+            <a:pPr rtl="0"/>
+            <a:r>
+              <a:rPr lang="ru-RU" sz="4400" dirty="0">
+                <a:latin typeface="Bahnschrift SemiBold Condensed" panose="020B0502040204020203" pitchFamily="34" charset="0"/>
+              </a:rPr>
+              <a:t>Курсового проектирования</a:t>
+            </a:r>
+          </a:p>
+        </p:txBody>
+      </p:sp>
+      <p:sp>
+        <p:nvSpPr>
+          <p:cNvPr id="10" name="TextBox 9">
+            <a:extLst>
+              <a:ext uri="{FF2B5EF4-FFF2-40B4-BE49-F238E27FC236}">
+                <a16:creationId xmlns:a16="http://schemas.microsoft.com/office/drawing/2014/main" id="{1486A56C-C28D-9092-1439-1F7B891D1472}"/>
+              </a:ext>
+            </a:extLst>
+          </p:cNvPr>
+          <p:cNvSpPr txBox="1"/>
+          <p:nvPr/>
+        </p:nvSpPr>
+        <p:spPr>
+          <a:xfrm>
+            <a:off x="312821" y="1866037"/>
+            <a:ext cx="6713621" cy="4108817"/>
+          </a:xfrm>
+          <a:prstGeom prst="rect">
+            <a:avLst/>
+          </a:prstGeom>
+          <a:noFill/>
+        </p:spPr>
+        <p:txBody>
+          <a:bodyPr wrap="square">
+            <a:spAutoFit/>
+          </a:bodyPr>
+          <a:lstStyle/>
+          <a:p>
+            <a:r>
+              <a:rPr lang="ru-RU" sz="2600" dirty="0">
+                <a:effectLst/>
+                <a:latin typeface="Times New Roman" panose="02020603050405020304" pitchFamily="18" charset="0"/>
+                <a:ea typeface="Calibri" panose="020F0502020204030204" pitchFamily="34" charset="0"/>
+              </a:rPr>
+              <a:t>Цель курсового проектирования заключается в закреплении, углублении и систематизации теоретических знаний и практических навыков, </a:t>
+            </a:r>
+            <a:r>
+              <a:rPr lang="ru-RU" sz="2700" dirty="0">
+                <a:effectLst/>
+                <a:latin typeface="Times New Roman" panose="02020603050405020304" pitchFamily="18" charset="0"/>
+                <a:ea typeface="Calibri" panose="020F0502020204030204" pitchFamily="34" charset="0"/>
+              </a:rPr>
+              <a:t>полученных</a:t>
+            </a:r>
+            <a:r>
+              <a:rPr lang="ru-RU" sz="2600" dirty="0">
+                <a:effectLst/>
+                <a:latin typeface="Times New Roman" panose="02020603050405020304" pitchFamily="18" charset="0"/>
+                <a:ea typeface="Calibri" panose="020F0502020204030204" pitchFamily="34" charset="0"/>
+              </a:rPr>
+              <a:t> в ходе изучения учебного предмета «Основы алгоритмизации и программирования», формировании навыков самостоятельного решения поставленных задач, а также в разработке игрового приложения «Пинг-понг» на </a:t>
+            </a:r>
+            <a:r>
+              <a:rPr lang="en-US" sz="2600" dirty="0">
+                <a:effectLst/>
+                <a:latin typeface="Times New Roman" panose="02020603050405020304" pitchFamily="18" charset="0"/>
+                <a:ea typeface="Calibri" panose="020F0502020204030204" pitchFamily="34" charset="0"/>
+              </a:rPr>
+              <a:t>DirectDraw</a:t>
+            </a:r>
+            <a:r>
+              <a:rPr lang="ru-RU" sz="2600" dirty="0">
+                <a:effectLst/>
+                <a:latin typeface="Times New Roman" panose="02020603050405020304" pitchFamily="18" charset="0"/>
+                <a:ea typeface="Calibri" panose="020F0502020204030204" pitchFamily="34" charset="0"/>
+              </a:rPr>
+              <a:t>.</a:t>
+            </a:r>
+            <a:endParaRPr lang="ru-RU" sz="2600" dirty="0"/>
           </a:p>
         </p:txBody>
       </p:sp>
       <p:pic>
         <p:nvPicPr>
-          <p:cNvPr id="3" name="Рисунок 2">
-            <a:extLst>
-              <a:ext uri="{FF2B5EF4-FFF2-40B4-BE49-F238E27FC236}">
-                <a16:creationId xmlns:a16="http://schemas.microsoft.com/office/drawing/2014/main" id="{606D5DEF-A906-88FF-B5B4-CFC7AD9C9493}"/>
+          <p:cNvPr id="3076" name="Picture 4">
+            <a:extLst>
+              <a:ext uri="{FF2B5EF4-FFF2-40B4-BE49-F238E27FC236}">
+                <a16:creationId xmlns:a16="http://schemas.microsoft.com/office/drawing/2014/main" id="{EF3AE6FF-50FB-D127-8F00-CF29868974A9}"/>
+              </a:ext>
+            </a:extLst>
+          </p:cNvPr>
+          <p:cNvPicPr>
+            <a:picLocks noChangeAspect="1" noChangeArrowheads="1"/>
+          </p:cNvPicPr>
+          <p:nvPr/>
+        </p:nvPicPr>
+        <p:blipFill>
+          <a:blip r:embed="rId3">
+            <a:extLst>
+              <a:ext uri="{28A0092B-C50C-407E-A947-70E740481C1C}">
+                <a14:useLocalDpi xmlns:a14="http://schemas.microsoft.com/office/drawing/2010/main" val="0"/>
+              </a:ext>
+            </a:extLst>
+          </a:blip>
+          <a:srcRect/>
+          <a:stretch>
+            <a:fillRect/>
+          </a:stretch>
+        </p:blipFill>
+        <p:spPr bwMode="auto">
+          <a:xfrm>
+            <a:off x="7467600" y="381000"/>
+            <a:ext cx="4572000" cy="3048000"/>
+          </a:xfrm>
+          <a:prstGeom prst="rect">
+            <a:avLst/>
+          </a:prstGeom>
+          <a:ln>
+            <a:noFill/>
+          </a:ln>
+          <a:effectLst>
+            <a:outerShdw blurRad="292100" dist="139700" dir="2700000" algn="tl" rotWithShape="0">
+              <a:srgbClr val="333333">
+                <a:alpha val="65000"/>
+              </a:srgbClr>
+            </a:outerShdw>
+          </a:effectLst>
+          <a:extLst>
+            <a:ext uri="{909E8E84-426E-40DD-AFC4-6F175D3DCCD1}">
+              <a14:hiddenFill xmlns:a14="http://schemas.microsoft.com/office/drawing/2010/main">
+                <a:solidFill>
+                  <a:srgbClr val="FFFFFF"/>
+                </a:solidFill>
+              </a14:hiddenFill>
+            </a:ext>
+          </a:extLst>
+        </p:spPr>
+      </p:pic>
+      <p:pic>
+        <p:nvPicPr>
+          <p:cNvPr id="5" name="Рисунок 4">
+            <a:extLst>
+              <a:ext uri="{FF2B5EF4-FFF2-40B4-BE49-F238E27FC236}">
+                <a16:creationId xmlns:a16="http://schemas.microsoft.com/office/drawing/2014/main" id="{AC8EDC07-93E9-BAFD-01FF-BF9076A0A8CB}"/>
               </a:ext>
             </a:extLst>
           </p:cNvPr>
@@ -5919,7 +5235,7 @@
           <p:nvPr/>
         </p:nvPicPr>
         <p:blipFill>
-          <a:blip r:embed="rId3">
+          <a:blip r:embed="rId4">
             <a:extLst>
               <a:ext uri="{28A0092B-C50C-407E-A947-70E740481C1C}">
                 <a14:useLocalDpi xmlns:a14="http://schemas.microsoft.com/office/drawing/2010/main" val="0"/>
@@ -5932,7 +5248,7 @@
         </p:blipFill>
         <p:spPr>
           <a:xfrm>
-            <a:off x="333800" y="232375"/>
+            <a:off x="8527388" y="4049816"/>
             <a:ext cx="2452423" cy="2427184"/>
           </a:xfrm>
           <a:prstGeom prst="ellipse">
@@ -5949,7 +5265,7 @@
     </p:spTree>
     <p:extLst>
       <p:ext uri="{BB962C8B-B14F-4D97-AF65-F5344CB8AC3E}">
-        <p14:creationId xmlns:p14="http://schemas.microsoft.com/office/powerpoint/2010/main" val="1379959202"/>
+        <p14:creationId xmlns:p14="http://schemas.microsoft.com/office/powerpoint/2010/main" val="4213627920"/>
       </p:ext>
     </p:extLst>
   </p:cSld>
@@ -5981,10 +5297,10 @@
       </p:grpSpPr>
       <p:pic>
         <p:nvPicPr>
-          <p:cNvPr id="3074" name="Picture 2" descr="Picture background">
-            <a:extLst>
-              <a:ext uri="{FF2B5EF4-FFF2-40B4-BE49-F238E27FC236}">
-                <a16:creationId xmlns:a16="http://schemas.microsoft.com/office/drawing/2014/main" id="{12C99207-3147-FC0E-661E-B27785B69D82}"/>
+          <p:cNvPr id="4098" name="Picture 2" descr="Picture background">
+            <a:extLst>
+              <a:ext uri="{FF2B5EF4-FFF2-40B4-BE49-F238E27FC236}">
+                <a16:creationId xmlns:a16="http://schemas.microsoft.com/office/drawing/2014/main" id="{5D139693-2D13-7264-6C0A-E111E4AF69DE}"/>
               </a:ext>
             </a:extLst>
           </p:cNvPr>
@@ -6028,10 +5344,10 @@
       </p:pic>
       <p:sp>
         <p:nvSpPr>
-          <p:cNvPr id="6" name="TextBox 5">
-            <a:extLst>
-              <a:ext uri="{FF2B5EF4-FFF2-40B4-BE49-F238E27FC236}">
-                <a16:creationId xmlns:a16="http://schemas.microsoft.com/office/drawing/2014/main" id="{96BE92EB-BB7A-69FA-3276-B95BE063F8B5}"/>
+          <p:cNvPr id="5" name="TextBox 4">
+            <a:extLst>
+              <a:ext uri="{FF2B5EF4-FFF2-40B4-BE49-F238E27FC236}">
+                <a16:creationId xmlns:a16="http://schemas.microsoft.com/office/drawing/2014/main" id="{873EE2F6-6583-8F45-5204-E592F9F8D8C6}"/>
               </a:ext>
             </a:extLst>
           </p:cNvPr>
@@ -6040,8 +5356,8 @@
         </p:nvSpPr>
         <p:spPr>
           <a:xfrm>
-            <a:off x="312821" y="237292"/>
-            <a:ext cx="6096000" cy="769441"/>
+            <a:off x="170047" y="87649"/>
+            <a:ext cx="6208294" cy="769441"/>
           </a:xfrm>
           <a:prstGeom prst="rect">
             <a:avLst/>
@@ -6058,17 +5374,17 @@
               <a:rPr lang="ru-RU" sz="4400" dirty="0">
                 <a:latin typeface="Bahnschrift SemiBold Condensed" panose="020B0502040204020203" pitchFamily="34" charset="0"/>
               </a:rPr>
-              <a:t>Цель</a:t>
-            </a:r>
-          </a:p>
-        </p:txBody>
-      </p:sp>
-      <p:sp>
-        <p:nvSpPr>
-          <p:cNvPr id="8" name="TextBox 7">
-            <a:extLst>
-              <a:ext uri="{FF2B5EF4-FFF2-40B4-BE49-F238E27FC236}">
-                <a16:creationId xmlns:a16="http://schemas.microsoft.com/office/drawing/2014/main" id="{C69D731B-DB0B-7F16-4356-C1723E8D66C6}"/>
+              <a:t>Задачи</a:t>
+            </a:r>
+          </a:p>
+        </p:txBody>
+      </p:sp>
+      <p:sp>
+        <p:nvSpPr>
+          <p:cNvPr id="7" name="TextBox 6">
+            <a:extLst>
+              <a:ext uri="{FF2B5EF4-FFF2-40B4-BE49-F238E27FC236}">
+                <a16:creationId xmlns:a16="http://schemas.microsoft.com/office/drawing/2014/main" id="{A4C7C2A5-1521-677F-8FE5-1709A5C4181D}"/>
               </a:ext>
             </a:extLst>
           </p:cNvPr>
@@ -6077,7 +5393,7 @@
         </p:nvSpPr>
         <p:spPr>
           <a:xfrm>
-            <a:off x="312821" y="859304"/>
+            <a:off x="170047" y="857090"/>
             <a:ext cx="6208294" cy="769441"/>
           </a:xfrm>
           <a:prstGeom prst="rect">
@@ -6103,10 +5419,10 @@
       </p:sp>
       <p:sp>
         <p:nvSpPr>
-          <p:cNvPr id="10" name="TextBox 9">
-            <a:extLst>
-              <a:ext uri="{FF2B5EF4-FFF2-40B4-BE49-F238E27FC236}">
-                <a16:creationId xmlns:a16="http://schemas.microsoft.com/office/drawing/2014/main" id="{1486A56C-C28D-9092-1439-1F7B891D1472}"/>
+          <p:cNvPr id="9" name="TextBox 8">
+            <a:extLst>
+              <a:ext uri="{FF2B5EF4-FFF2-40B4-BE49-F238E27FC236}">
+                <a16:creationId xmlns:a16="http://schemas.microsoft.com/office/drawing/2014/main" id="{1FCF682B-C868-9994-C941-7CC3C141B845}"/>
               </a:ext>
             </a:extLst>
           </p:cNvPr>
@@ -6115,8 +5431,8 @@
         </p:nvSpPr>
         <p:spPr>
           <a:xfrm>
-            <a:off x="312821" y="1866037"/>
-            <a:ext cx="6713621" cy="4108817"/>
+            <a:off x="194352" y="1626531"/>
+            <a:ext cx="11692848" cy="4893647"/>
           </a:xfrm>
           <a:prstGeom prst="rect">
             <a:avLst/>
@@ -6129,152 +5445,175 @@
           </a:bodyPr>
           <a:lstStyle/>
           <a:p>
-            <a:r>
-              <a:rPr lang="ru-RU" sz="2600" dirty="0">
+            <a:pPr indent="540385" algn="just"/>
+            <a:r>
+              <a:rPr lang="ru-RU" sz="2400" dirty="0">
                 <a:effectLst/>
                 <a:latin typeface="Times New Roman" panose="02020603050405020304" pitchFamily="18" charset="0"/>
                 <a:ea typeface="Calibri" panose="020F0502020204030204" pitchFamily="34" charset="0"/>
-              </a:rPr>
-              <a:t>Цель курсового проектирования заключается в закреплении, углублении и систематизации теоретических знаний и практических навыков, </a:t>
-            </a:r>
-            <a:r>
-              <a:rPr lang="ru-RU" sz="2700" dirty="0">
+                <a:cs typeface="Times New Roman" panose="02020603050405020304" pitchFamily="18" charset="0"/>
+              </a:rPr>
+              <a:t>Для достижения поставленной цели были определены следующие задачи: </a:t>
+            </a:r>
+          </a:p>
+          <a:p>
+            <a:pPr indent="540385" algn="just"/>
+            <a:r>
+              <a:rPr lang="ru-RU" sz="2400" dirty="0">
                 <a:effectLst/>
                 <a:latin typeface="Times New Roman" panose="02020603050405020304" pitchFamily="18" charset="0"/>
                 <a:ea typeface="Calibri" panose="020F0502020204030204" pitchFamily="34" charset="0"/>
-              </a:rPr>
-              <a:t>полученных</a:t>
-            </a:r>
-            <a:r>
-              <a:rPr lang="ru-RU" sz="2600" dirty="0">
+                <a:cs typeface="Times New Roman" panose="02020603050405020304" pitchFamily="18" charset="0"/>
+              </a:rPr>
+              <a:t>‒ изучить и проанализировать предметную область темы проекта; </a:t>
+            </a:r>
+          </a:p>
+          <a:p>
+            <a:pPr indent="540385" algn="just"/>
+            <a:r>
+              <a:rPr lang="ru-RU" sz="2400" dirty="0">
                 <a:effectLst/>
                 <a:latin typeface="Times New Roman" panose="02020603050405020304" pitchFamily="18" charset="0"/>
                 <a:ea typeface="Calibri" panose="020F0502020204030204" pitchFamily="34" charset="0"/>
-              </a:rPr>
-              <a:t> в ходе изучения учебного предмета «Основы алгоритмизации и программирования», формировании навыков самостоятельного решения поставленных задач, а также в разработке игрового приложения «Пинг-понг» на </a:t>
-            </a:r>
-            <a:r>
-              <a:rPr lang="en-US" sz="2600" dirty="0">
+                <a:cs typeface="Times New Roman" panose="02020603050405020304" pitchFamily="18" charset="0"/>
+              </a:rPr>
+              <a:t>‒ рассмотреть аналогичные по теме проекта программы; </a:t>
+            </a:r>
+          </a:p>
+          <a:p>
+            <a:pPr indent="540385" algn="just"/>
+            <a:r>
+              <a:rPr lang="ru-RU" sz="2400" dirty="0">
                 <a:effectLst/>
                 <a:latin typeface="Times New Roman" panose="02020603050405020304" pitchFamily="18" charset="0"/>
                 <a:ea typeface="Calibri" panose="020F0502020204030204" pitchFamily="34" charset="0"/>
-              </a:rPr>
-              <a:t>DirectDraw</a:t>
-            </a:r>
-            <a:r>
-              <a:rPr lang="ru-RU" sz="2600" dirty="0">
+                <a:cs typeface="Times New Roman" panose="02020603050405020304" pitchFamily="18" charset="0"/>
+              </a:rPr>
+              <a:t>‒ спроектировать программное средство с помощью различных диаграмм; </a:t>
+            </a:r>
+          </a:p>
+          <a:p>
+            <a:pPr indent="540385" algn="just"/>
+            <a:r>
+              <a:rPr lang="ru-RU" sz="2400" dirty="0">
                 <a:effectLst/>
                 <a:latin typeface="Times New Roman" panose="02020603050405020304" pitchFamily="18" charset="0"/>
                 <a:ea typeface="Calibri" panose="020F0502020204030204" pitchFamily="34" charset="0"/>
-              </a:rPr>
-              <a:t>.</a:t>
-            </a:r>
-            <a:endParaRPr lang="ru-RU" sz="2600" dirty="0"/>
-          </a:p>
-        </p:txBody>
-      </p:sp>
-      <p:pic>
-        <p:nvPicPr>
-          <p:cNvPr id="3076" name="Picture 4">
-            <a:extLst>
-              <a:ext uri="{FF2B5EF4-FFF2-40B4-BE49-F238E27FC236}">
-                <a16:creationId xmlns:a16="http://schemas.microsoft.com/office/drawing/2014/main" id="{EF3AE6FF-50FB-D127-8F00-CF29868974A9}"/>
-              </a:ext>
-            </a:extLst>
-          </p:cNvPr>
-          <p:cNvPicPr>
-            <a:picLocks noChangeAspect="1" noChangeArrowheads="1"/>
-          </p:cNvPicPr>
-          <p:nvPr/>
-        </p:nvPicPr>
-        <p:blipFill>
-          <a:blip r:embed="rId3">
-            <a:extLst>
-              <a:ext uri="{28A0092B-C50C-407E-A947-70E740481C1C}">
-                <a14:useLocalDpi xmlns:a14="http://schemas.microsoft.com/office/drawing/2010/main" val="0"/>
-              </a:ext>
-            </a:extLst>
-          </a:blip>
-          <a:srcRect/>
-          <a:stretch>
-            <a:fillRect/>
-          </a:stretch>
-        </p:blipFill>
-        <p:spPr bwMode="auto">
-          <a:xfrm>
-            <a:off x="7467600" y="381000"/>
-            <a:ext cx="4572000" cy="3048000"/>
-          </a:xfrm>
-          <a:prstGeom prst="rect">
-            <a:avLst/>
-          </a:prstGeom>
-          <a:ln>
-            <a:noFill/>
-          </a:ln>
-          <a:effectLst>
-            <a:outerShdw blurRad="292100" dist="139700" dir="2700000" algn="tl" rotWithShape="0">
-              <a:srgbClr val="333333">
-                <a:alpha val="65000"/>
-              </a:srgbClr>
-            </a:outerShdw>
-          </a:effectLst>
-          <a:extLst>
-            <a:ext uri="{909E8E84-426E-40DD-AFC4-6F175D3DCCD1}">
-              <a14:hiddenFill xmlns:a14="http://schemas.microsoft.com/office/drawing/2010/main">
-                <a:solidFill>
-                  <a:srgbClr val="FFFFFF"/>
-                </a:solidFill>
-              </a14:hiddenFill>
-            </a:ext>
-          </a:extLst>
-        </p:spPr>
-      </p:pic>
-      <p:pic>
-        <p:nvPicPr>
-          <p:cNvPr id="5" name="Рисунок 4">
-            <a:extLst>
-              <a:ext uri="{FF2B5EF4-FFF2-40B4-BE49-F238E27FC236}">
-                <a16:creationId xmlns:a16="http://schemas.microsoft.com/office/drawing/2014/main" id="{AC8EDC07-93E9-BAFD-01FF-BF9076A0A8CB}"/>
-              </a:ext>
-            </a:extLst>
-          </p:cNvPr>
-          <p:cNvPicPr>
-            <a:picLocks noChangeAspect="1"/>
-          </p:cNvPicPr>
-          <p:nvPr/>
-        </p:nvPicPr>
-        <p:blipFill>
-          <a:blip r:embed="rId4">
-            <a:extLst>
-              <a:ext uri="{28A0092B-C50C-407E-A947-70E740481C1C}">
-                <a14:useLocalDpi xmlns:a14="http://schemas.microsoft.com/office/drawing/2010/main" val="0"/>
-              </a:ext>
-            </a:extLst>
-          </a:blip>
-          <a:stretch>
-            <a:fillRect/>
-          </a:stretch>
-        </p:blipFill>
-        <p:spPr>
-          <a:xfrm>
-            <a:off x="8527388" y="4049816"/>
-            <a:ext cx="2452423" cy="2427184"/>
-          </a:xfrm>
-          <a:prstGeom prst="ellipse">
-            <a:avLst/>
-          </a:prstGeom>
-          <a:ln>
-            <a:noFill/>
-          </a:ln>
-          <a:effectLst>
-            <a:softEdge rad="112500"/>
-          </a:effectLst>
-        </p:spPr>
-      </p:pic>
+                <a:cs typeface="Times New Roman" panose="02020603050405020304" pitchFamily="18" charset="0"/>
+              </a:rPr>
+              <a:t>‒ определить технологии разработки ПО; </a:t>
+            </a:r>
+          </a:p>
+          <a:p>
+            <a:pPr indent="540385" algn="just"/>
+            <a:r>
+              <a:rPr lang="ru-RU" sz="2400" dirty="0">
+                <a:effectLst/>
+                <a:latin typeface="Times New Roman" panose="02020603050405020304" pitchFamily="18" charset="0"/>
+                <a:ea typeface="Calibri" panose="020F0502020204030204" pitchFamily="34" charset="0"/>
+                <a:cs typeface="Times New Roman" panose="02020603050405020304" pitchFamily="18" charset="0"/>
+              </a:rPr>
+              <a:t>‒ разработать программное средство; </a:t>
+            </a:r>
+          </a:p>
+          <a:p>
+            <a:pPr indent="540385" algn="just"/>
+            <a:r>
+              <a:rPr lang="ru-RU" sz="2400" dirty="0">
+                <a:effectLst/>
+                <a:latin typeface="Times New Roman" panose="02020603050405020304" pitchFamily="18" charset="0"/>
+                <a:ea typeface="Calibri" panose="020F0502020204030204" pitchFamily="34" charset="0"/>
+                <a:cs typeface="Times New Roman" panose="02020603050405020304" pitchFamily="18" charset="0"/>
+              </a:rPr>
+              <a:t>‒ разработать документацию к программному средству; </a:t>
+            </a:r>
+          </a:p>
+          <a:p>
+            <a:pPr indent="539750">
+              <a:tabLst>
+                <a:tab pos="623888" algn="l"/>
+                <a:tab pos="893763" algn="l"/>
+              </a:tabLst>
+            </a:pPr>
+            <a:r>
+              <a:rPr lang="ru-RU" sz="2400" dirty="0">
+                <a:effectLst/>
+                <a:latin typeface="Times New Roman" panose="02020603050405020304" pitchFamily="18" charset="0"/>
+                <a:ea typeface="Calibri" panose="020F0502020204030204" pitchFamily="34" charset="0"/>
+                <a:cs typeface="Times New Roman" panose="02020603050405020304" pitchFamily="18" charset="0"/>
+              </a:rPr>
+              <a:t>‒</a:t>
+            </a:r>
+            <a:r>
+              <a:rPr lang="ru-RU" sz="2400" dirty="0">
+                <a:latin typeface="Times New Roman" panose="02020603050405020304" pitchFamily="18" charset="0"/>
+                <a:ea typeface="Calibri" panose="020F0502020204030204" pitchFamily="34" charset="0"/>
+                <a:cs typeface="Times New Roman" panose="02020603050405020304" pitchFamily="18" charset="0"/>
+              </a:rPr>
+              <a:t> </a:t>
+            </a:r>
+            <a:r>
+              <a:rPr lang="ru-RU" sz="2400" dirty="0">
+                <a:effectLst/>
+                <a:latin typeface="Times New Roman" panose="02020603050405020304" pitchFamily="18" charset="0"/>
+                <a:ea typeface="Calibri" panose="020F0502020204030204" pitchFamily="34" charset="0"/>
+                <a:cs typeface="Times New Roman" panose="02020603050405020304" pitchFamily="18" charset="0"/>
+              </a:rPr>
+              <a:t>разработать справочную документацию по использованию программного средства; </a:t>
+            </a:r>
+          </a:p>
+          <a:p>
+            <a:pPr indent="540385" algn="just"/>
+            <a:r>
+              <a:rPr lang="ru-RU" sz="2400" dirty="0">
+                <a:effectLst/>
+                <a:latin typeface="Times New Roman" panose="02020603050405020304" pitchFamily="18" charset="0"/>
+                <a:ea typeface="Calibri" panose="020F0502020204030204" pitchFamily="34" charset="0"/>
+                <a:cs typeface="Times New Roman" panose="02020603050405020304" pitchFamily="18" charset="0"/>
+              </a:rPr>
+              <a:t>‒ провести тестирование программного средства. </a:t>
+            </a:r>
+            <a:endParaRPr lang="ru-RU" sz="2400" dirty="0">
+              <a:latin typeface="Times New Roman" panose="02020603050405020304" pitchFamily="18" charset="0"/>
+              <a:ea typeface="Calibri" panose="020F0502020204030204" pitchFamily="34" charset="0"/>
+              <a:cs typeface="Times New Roman" panose="02020603050405020304" pitchFamily="18" charset="0"/>
+            </a:endParaRPr>
+          </a:p>
+          <a:p>
+            <a:pPr indent="540385" algn="just"/>
+            <a:r>
+              <a:rPr lang="ru-RU" sz="2400" dirty="0">
+                <a:effectLst/>
+                <a:latin typeface="Times New Roman" panose="02020603050405020304" pitchFamily="18" charset="0"/>
+                <a:ea typeface="Calibri" panose="020F0502020204030204" pitchFamily="34" charset="0"/>
+                <a:cs typeface="Times New Roman" panose="02020603050405020304" pitchFamily="18" charset="0"/>
+              </a:rPr>
+              <a:t>Также </a:t>
+            </a:r>
+            <a:r>
+              <a:rPr lang="ru-RU" sz="2400" dirty="0">
+                <a:latin typeface="Times New Roman" panose="02020603050405020304" pitchFamily="18" charset="0"/>
+                <a:ea typeface="Calibri" panose="020F0502020204030204" pitchFamily="34" charset="0"/>
+                <a:cs typeface="Times New Roman" panose="02020603050405020304" pitchFamily="18" charset="0"/>
+              </a:rPr>
+              <a:t>в </a:t>
+            </a:r>
+            <a:r>
+              <a:rPr lang="ru-RU" sz="2400" dirty="0">
+                <a:effectLst/>
+                <a:latin typeface="Times New Roman" panose="02020603050405020304" pitchFamily="18" charset="0"/>
+                <a:ea typeface="Calibri" panose="020F0502020204030204" pitchFamily="34" charset="0"/>
+                <a:cs typeface="Times New Roman" panose="02020603050405020304" pitchFamily="18" charset="0"/>
+              </a:rPr>
+              <a:t>рамках проекта были изучены методы анализа пользовательских требований и разработка функциональных программных решений, способных эффективно удовлетворить эти требования. </a:t>
+            </a:r>
+          </a:p>
+        </p:txBody>
+      </p:sp>
     </p:spTree>
     <p:extLst>
       <p:ext uri="{BB962C8B-B14F-4D97-AF65-F5344CB8AC3E}">
-        <p14:creationId xmlns:p14="http://schemas.microsoft.com/office/powerpoint/2010/main" val="4213627920"/>
+        <p14:creationId xmlns:p14="http://schemas.microsoft.com/office/powerpoint/2010/main" val="2823194359"/>
       </p:ext>
     </p:extLst>
   </p:cSld>
@@ -6306,10 +5645,10 @@
       </p:grpSpPr>
       <p:pic>
         <p:nvPicPr>
-          <p:cNvPr id="4098" name="Picture 2" descr="Picture background">
-            <a:extLst>
-              <a:ext uri="{FF2B5EF4-FFF2-40B4-BE49-F238E27FC236}">
-                <a16:creationId xmlns:a16="http://schemas.microsoft.com/office/drawing/2014/main" id="{5D139693-2D13-7264-6C0A-E111E4AF69DE}"/>
+          <p:cNvPr id="5122" name="Picture 2" descr="Picture background">
+            <a:extLst>
+              <a:ext uri="{FF2B5EF4-FFF2-40B4-BE49-F238E27FC236}">
+                <a16:creationId xmlns:a16="http://schemas.microsoft.com/office/drawing/2014/main" id="{EF7AAAEF-0306-FF07-98E7-0EC4CD5B7B2F}"/>
               </a:ext>
             </a:extLst>
           </p:cNvPr>
@@ -6353,10 +5692,10 @@
       </p:pic>
       <p:sp>
         <p:nvSpPr>
-          <p:cNvPr id="5" name="TextBox 4">
-            <a:extLst>
-              <a:ext uri="{FF2B5EF4-FFF2-40B4-BE49-F238E27FC236}">
-                <a16:creationId xmlns:a16="http://schemas.microsoft.com/office/drawing/2014/main" id="{873EE2F6-6583-8F45-5204-E592F9F8D8C6}"/>
+          <p:cNvPr id="4" name="TextBox 3">
+            <a:extLst>
+              <a:ext uri="{FF2B5EF4-FFF2-40B4-BE49-F238E27FC236}">
+                <a16:creationId xmlns:a16="http://schemas.microsoft.com/office/drawing/2014/main" id="{CEA7597A-A6A0-9678-03E1-38EFF8A52214}"/>
               </a:ext>
             </a:extLst>
           </p:cNvPr>
@@ -6365,8 +5704,8 @@
         </p:nvSpPr>
         <p:spPr>
           <a:xfrm>
-            <a:off x="170047" y="87649"/>
-            <a:ext cx="6208294" cy="769441"/>
+            <a:off x="266699" y="185868"/>
+            <a:ext cx="6096000" cy="769441"/>
           </a:xfrm>
           <a:prstGeom prst="rect">
             <a:avLst/>
@@ -6383,17 +5722,17 @@
               <a:rPr lang="ru-RU" sz="4400" dirty="0">
                 <a:latin typeface="Bahnschrift SemiBold Condensed" panose="020B0502040204020203" pitchFamily="34" charset="0"/>
               </a:rPr>
-              <a:t>Задачи</a:t>
-            </a:r>
-          </a:p>
-        </p:txBody>
-      </p:sp>
-      <p:sp>
-        <p:nvSpPr>
-          <p:cNvPr id="7" name="TextBox 6">
-            <a:extLst>
-              <a:ext uri="{FF2B5EF4-FFF2-40B4-BE49-F238E27FC236}">
-                <a16:creationId xmlns:a16="http://schemas.microsoft.com/office/drawing/2014/main" id="{A4C7C2A5-1521-677F-8FE5-1709A5C4181D}"/>
+              <a:t>Актуальность</a:t>
+            </a:r>
+          </a:p>
+        </p:txBody>
+      </p:sp>
+      <p:sp>
+        <p:nvSpPr>
+          <p:cNvPr id="6" name="TextBox 5">
+            <a:extLst>
+              <a:ext uri="{FF2B5EF4-FFF2-40B4-BE49-F238E27FC236}">
+                <a16:creationId xmlns:a16="http://schemas.microsoft.com/office/drawing/2014/main" id="{646AAECF-7617-669F-6FFA-5ED87B19F2D8}"/>
               </a:ext>
             </a:extLst>
           </p:cNvPr>
@@ -6402,7 +5741,7 @@
         </p:nvSpPr>
         <p:spPr>
           <a:xfrm>
-            <a:off x="170047" y="857090"/>
+            <a:off x="266699" y="756456"/>
             <a:ext cx="6208294" cy="769441"/>
           </a:xfrm>
           <a:prstGeom prst="rect">
@@ -6419,7 +5758,7 @@
             <a:pPr rtl="0"/>
             <a:r>
               <a:rPr lang="ru-RU" sz="4400" dirty="0">
-                <a:latin typeface="Bahnschrift SemiBold Condensed" panose="020B0502040204020203" pitchFamily="34" charset="0"/>
+                <a:latin typeface="Bahnschrift Condensed" panose="020B0502040204020203" pitchFamily="34" charset="0"/>
               </a:rPr>
               <a:t>Курсового проектирования</a:t>
             </a:r>
@@ -6428,10 +5767,10 @@
       </p:sp>
       <p:sp>
         <p:nvSpPr>
-          <p:cNvPr id="9" name="TextBox 8">
-            <a:extLst>
-              <a:ext uri="{FF2B5EF4-FFF2-40B4-BE49-F238E27FC236}">
-                <a16:creationId xmlns:a16="http://schemas.microsoft.com/office/drawing/2014/main" id="{1FCF682B-C868-9994-C941-7CC3C141B845}"/>
+          <p:cNvPr id="14" name="TextBox 13">
+            <a:extLst>
+              <a:ext uri="{FF2B5EF4-FFF2-40B4-BE49-F238E27FC236}">
+                <a16:creationId xmlns:a16="http://schemas.microsoft.com/office/drawing/2014/main" id="{8D36F160-A48E-60C8-07A2-53DF6E3BF7D5}"/>
               </a:ext>
             </a:extLst>
           </p:cNvPr>
@@ -6440,8 +5779,8 @@
         </p:nvSpPr>
         <p:spPr>
           <a:xfrm>
-            <a:off x="194352" y="1626531"/>
-            <a:ext cx="11692848" cy="4893647"/>
+            <a:off x="266698" y="1402591"/>
+            <a:ext cx="6474994" cy="5509200"/>
           </a:xfrm>
           <a:prstGeom prst="rect">
             <a:avLst/>
@@ -6454,175 +5793,150 @@
           </a:bodyPr>
           <a:lstStyle/>
           <a:p>
-            <a:pPr indent="540385" algn="just"/>
-            <a:r>
-              <a:rPr lang="ru-RU" sz="2400" dirty="0">
-                <a:effectLst/>
+            <a:r>
+              <a:rPr lang="ru-BY" sz="2200" dirty="0">
                 <a:latin typeface="Times New Roman" panose="02020603050405020304" pitchFamily="18" charset="0"/>
-                <a:ea typeface="Calibri" panose="020F0502020204030204" pitchFamily="34" charset="0"/>
                 <a:cs typeface="Times New Roman" panose="02020603050405020304" pitchFamily="18" charset="0"/>
               </a:rPr>
-              <a:t>Для достижения поставленной цели были определены следующие задачи: </a:t>
-            </a:r>
-          </a:p>
-          <a:p>
-            <a:pPr indent="540385" algn="just"/>
-            <a:r>
-              <a:rPr lang="ru-RU" sz="2400" dirty="0">
-                <a:effectLst/>
+              <a:t>Актуальность курсового проектирования состоит в том, что в современном мире, несмотря на обилие готовых игровых движков и фреймворков, остаётся важной задачей понимание фундаментальных принципов работы компьютерной графики. Разработка игр с использованием низкоуровневых графических API, таких как </a:t>
+            </a:r>
+            <a:r>
+              <a:rPr lang="ru-BY" sz="2200" dirty="0" err="1">
                 <a:latin typeface="Times New Roman" panose="02020603050405020304" pitchFamily="18" charset="0"/>
-                <a:ea typeface="Calibri" panose="020F0502020204030204" pitchFamily="34" charset="0"/>
                 <a:cs typeface="Times New Roman" panose="02020603050405020304" pitchFamily="18" charset="0"/>
               </a:rPr>
-              <a:t>‒ изучить и проанализировать предметную область темы проекта; </a:t>
-            </a:r>
-          </a:p>
-          <a:p>
-            <a:pPr indent="540385" algn="just"/>
-            <a:r>
-              <a:rPr lang="ru-RU" sz="2400" dirty="0">
-                <a:effectLst/>
+              <a:t>DirectDraw</a:t>
+            </a:r>
+            <a:r>
+              <a:rPr lang="ru-BY" sz="2200" dirty="0">
                 <a:latin typeface="Times New Roman" panose="02020603050405020304" pitchFamily="18" charset="0"/>
-                <a:ea typeface="Calibri" panose="020F0502020204030204" pitchFamily="34" charset="0"/>
                 <a:cs typeface="Times New Roman" panose="02020603050405020304" pitchFamily="18" charset="0"/>
               </a:rPr>
-              <a:t>‒ рассмотреть аналогичные по теме проекта программы; </a:t>
-            </a:r>
-          </a:p>
-          <a:p>
-            <a:pPr indent="540385" algn="just"/>
-            <a:r>
-              <a:rPr lang="ru-RU" sz="2400" dirty="0">
-                <a:effectLst/>
+              <a:t>, позволяет детально разобраться в управлении видеопамятью, двойной буферизации, обработке столкновений и построении игрового цикла. В связи с этим, создание классической аркадной игры «Пинг-понг» на </a:t>
+            </a:r>
+            <a:r>
+              <a:rPr lang="ru-BY" sz="2200" dirty="0" err="1">
                 <a:latin typeface="Times New Roman" panose="02020603050405020304" pitchFamily="18" charset="0"/>
-                <a:ea typeface="Calibri" panose="020F0502020204030204" pitchFamily="34" charset="0"/>
                 <a:cs typeface="Times New Roman" panose="02020603050405020304" pitchFamily="18" charset="0"/>
               </a:rPr>
-              <a:t>‒ спроектировать программное средство с помощью различных диаграмм; </a:t>
-            </a:r>
-          </a:p>
-          <a:p>
-            <a:pPr indent="540385" algn="just"/>
-            <a:r>
-              <a:rPr lang="ru-RU" sz="2400" dirty="0">
-                <a:effectLst/>
+              <a:t>DirectDraw</a:t>
+            </a:r>
+            <a:r>
+              <a:rPr lang="ru-BY" sz="2200" dirty="0">
                 <a:latin typeface="Times New Roman" panose="02020603050405020304" pitchFamily="18" charset="0"/>
-                <a:ea typeface="Calibri" panose="020F0502020204030204" pitchFamily="34" charset="0"/>
                 <a:cs typeface="Times New Roman" panose="02020603050405020304" pitchFamily="18" charset="0"/>
               </a:rPr>
-              <a:t>‒ определить технологии разработки ПО; </a:t>
-            </a:r>
-          </a:p>
-          <a:p>
-            <a:pPr indent="540385" algn="just"/>
-            <a:r>
-              <a:rPr lang="ru-RU" sz="2400" dirty="0">
-                <a:effectLst/>
-                <a:latin typeface="Times New Roman" panose="02020603050405020304" pitchFamily="18" charset="0"/>
-                <a:ea typeface="Calibri" panose="020F0502020204030204" pitchFamily="34" charset="0"/>
-                <a:cs typeface="Times New Roman" panose="02020603050405020304" pitchFamily="18" charset="0"/>
-              </a:rPr>
-              <a:t>‒ разработать программное средство; </a:t>
-            </a:r>
-          </a:p>
-          <a:p>
-            <a:pPr indent="540385" algn="just"/>
-            <a:r>
-              <a:rPr lang="ru-RU" sz="2400" dirty="0">
-                <a:effectLst/>
-                <a:latin typeface="Times New Roman" panose="02020603050405020304" pitchFamily="18" charset="0"/>
-                <a:ea typeface="Calibri" panose="020F0502020204030204" pitchFamily="34" charset="0"/>
-                <a:cs typeface="Times New Roman" panose="02020603050405020304" pitchFamily="18" charset="0"/>
-              </a:rPr>
-              <a:t>‒ разработать документацию к программному средству; </a:t>
-            </a:r>
-          </a:p>
-          <a:p>
-            <a:pPr indent="539750">
-              <a:tabLst>
-                <a:tab pos="623888" algn="l"/>
-                <a:tab pos="893763" algn="l"/>
-              </a:tabLst>
-            </a:pPr>
-            <a:r>
-              <a:rPr lang="ru-RU" sz="2400" dirty="0">
-                <a:effectLst/>
-                <a:latin typeface="Times New Roman" panose="02020603050405020304" pitchFamily="18" charset="0"/>
-                <a:ea typeface="Calibri" panose="020F0502020204030204" pitchFamily="34" charset="0"/>
-                <a:cs typeface="Times New Roman" panose="02020603050405020304" pitchFamily="18" charset="0"/>
-              </a:rPr>
-              <a:t>‒</a:t>
-            </a:r>
-            <a:r>
-              <a:rPr lang="ru-RU" sz="2400" dirty="0">
-                <a:latin typeface="Times New Roman" panose="02020603050405020304" pitchFamily="18" charset="0"/>
-                <a:ea typeface="Calibri" panose="020F0502020204030204" pitchFamily="34" charset="0"/>
-                <a:cs typeface="Times New Roman" panose="02020603050405020304" pitchFamily="18" charset="0"/>
-              </a:rPr>
-              <a:t> </a:t>
-            </a:r>
-            <a:r>
-              <a:rPr lang="ru-RU" sz="2400" dirty="0">
-                <a:effectLst/>
-                <a:latin typeface="Times New Roman" panose="02020603050405020304" pitchFamily="18" charset="0"/>
-                <a:ea typeface="Calibri" panose="020F0502020204030204" pitchFamily="34" charset="0"/>
-                <a:cs typeface="Times New Roman" panose="02020603050405020304" pitchFamily="18" charset="0"/>
-              </a:rPr>
-              <a:t>разработать справочную документацию по использованию программного средства; </a:t>
-            </a:r>
-          </a:p>
-          <a:p>
-            <a:pPr indent="540385" algn="just"/>
-            <a:r>
-              <a:rPr lang="ru-RU" sz="2400" dirty="0">
-                <a:effectLst/>
-                <a:latin typeface="Times New Roman" panose="02020603050405020304" pitchFamily="18" charset="0"/>
-                <a:ea typeface="Calibri" panose="020F0502020204030204" pitchFamily="34" charset="0"/>
-                <a:cs typeface="Times New Roman" panose="02020603050405020304" pitchFamily="18" charset="0"/>
-              </a:rPr>
-              <a:t>‒ провести тестирование программного средства. </a:t>
-            </a:r>
-            <a:endParaRPr lang="ru-RU" sz="2400" dirty="0">
+              <a:t> становится особенно значимой задачей, так как позволяет не только получить полноценный игровой продукт, но и сформировать глубокое понимание процессов, лежащих в основе современных графических библиотек.</a:t>
+            </a:r>
+            <a:endParaRPr lang="ru-RU" sz="2200" dirty="0">
               <a:latin typeface="Times New Roman" panose="02020603050405020304" pitchFamily="18" charset="0"/>
-              <a:ea typeface="Calibri" panose="020F0502020204030204" pitchFamily="34" charset="0"/>
               <a:cs typeface="Times New Roman" panose="02020603050405020304" pitchFamily="18" charset="0"/>
             </a:endParaRPr>
           </a:p>
-          <a:p>
-            <a:pPr indent="540385" algn="just"/>
-            <a:r>
-              <a:rPr lang="ru-RU" sz="2400" dirty="0">
-                <a:effectLst/>
-                <a:latin typeface="Times New Roman" panose="02020603050405020304" pitchFamily="18" charset="0"/>
-                <a:ea typeface="Calibri" panose="020F0502020204030204" pitchFamily="34" charset="0"/>
-                <a:cs typeface="Times New Roman" panose="02020603050405020304" pitchFamily="18" charset="0"/>
-              </a:rPr>
-              <a:t>Также </a:t>
-            </a:r>
-            <a:r>
-              <a:rPr lang="ru-RU" sz="2400" dirty="0">
-                <a:latin typeface="Times New Roman" panose="02020603050405020304" pitchFamily="18" charset="0"/>
-                <a:ea typeface="Calibri" panose="020F0502020204030204" pitchFamily="34" charset="0"/>
-                <a:cs typeface="Times New Roman" panose="02020603050405020304" pitchFamily="18" charset="0"/>
-              </a:rPr>
-              <a:t>в </a:t>
-            </a:r>
-            <a:r>
-              <a:rPr lang="ru-RU" sz="2400" dirty="0">
-                <a:effectLst/>
-                <a:latin typeface="Times New Roman" panose="02020603050405020304" pitchFamily="18" charset="0"/>
-                <a:ea typeface="Calibri" panose="020F0502020204030204" pitchFamily="34" charset="0"/>
-                <a:cs typeface="Times New Roman" panose="02020603050405020304" pitchFamily="18" charset="0"/>
-              </a:rPr>
-              <a:t>рамках проекта были изучены методы анализа пользовательских требований и разработка функциональных программных решений, способных эффективно удовлетворить эти требования. </a:t>
-            </a:r>
-          </a:p>
-        </p:txBody>
-      </p:sp>
+        </p:txBody>
+      </p:sp>
+      <p:pic>
+        <p:nvPicPr>
+          <p:cNvPr id="5136" name="Picture 16" descr="Разработка программного обеспечения документы">
+            <a:extLst>
+              <a:ext uri="{FF2B5EF4-FFF2-40B4-BE49-F238E27FC236}">
+                <a16:creationId xmlns:a16="http://schemas.microsoft.com/office/drawing/2014/main" id="{4EF5C83C-EEEE-42FD-58CB-ABB592E5C7BD}"/>
+              </a:ext>
+            </a:extLst>
+          </p:cNvPr>
+          <p:cNvPicPr>
+            <a:picLocks noChangeAspect="1" noChangeArrowheads="1"/>
+          </p:cNvPicPr>
+          <p:nvPr/>
+        </p:nvPicPr>
+        <p:blipFill>
+          <a:blip r:embed="rId3">
+            <a:extLst>
+              <a:ext uri="{28A0092B-C50C-407E-A947-70E740481C1C}">
+                <a14:useLocalDpi xmlns:a14="http://schemas.microsoft.com/office/drawing/2010/main" val="0"/>
+              </a:ext>
+            </a:extLst>
+          </a:blip>
+          <a:srcRect/>
+          <a:stretch>
+            <a:fillRect/>
+          </a:stretch>
+        </p:blipFill>
+        <p:spPr bwMode="auto">
+          <a:xfrm>
+            <a:off x="6741693" y="331808"/>
+            <a:ext cx="5183608" cy="3600112"/>
+          </a:xfrm>
+          <a:prstGeom prst="rect">
+            <a:avLst/>
+          </a:prstGeom>
+          <a:ln>
+            <a:noFill/>
+          </a:ln>
+          <a:effectLst>
+            <a:outerShdw blurRad="292100" dist="139700" dir="2700000" algn="tl" rotWithShape="0">
+              <a:srgbClr val="333333">
+                <a:alpha val="65000"/>
+              </a:srgbClr>
+            </a:outerShdw>
+          </a:effectLst>
+          <a:extLst>
+            <a:ext uri="{909E8E84-426E-40DD-AFC4-6F175D3DCCD1}">
+              <a14:hiddenFill xmlns:a14="http://schemas.microsoft.com/office/drawing/2010/main">
+                <a:solidFill>
+                  <a:srgbClr val="FFFFFF"/>
+                </a:solidFill>
+              </a14:hiddenFill>
+            </a:ext>
+          </a:extLst>
+        </p:spPr>
+      </p:pic>
+      <p:pic>
+        <p:nvPicPr>
+          <p:cNvPr id="8" name="Рисунок 7">
+            <a:extLst>
+              <a:ext uri="{FF2B5EF4-FFF2-40B4-BE49-F238E27FC236}">
+                <a16:creationId xmlns:a16="http://schemas.microsoft.com/office/drawing/2014/main" id="{469CB28B-2440-FECB-F792-DF7BB987FC17}"/>
+              </a:ext>
+            </a:extLst>
+          </p:cNvPr>
+          <p:cNvPicPr>
+            <a:picLocks noChangeAspect="1"/>
+          </p:cNvPicPr>
+          <p:nvPr/>
+        </p:nvPicPr>
+        <p:blipFill>
+          <a:blip r:embed="rId4">
+            <a:extLst>
+              <a:ext uri="{28A0092B-C50C-407E-A947-70E740481C1C}">
+                <a14:useLocalDpi xmlns:a14="http://schemas.microsoft.com/office/drawing/2010/main" val="0"/>
+              </a:ext>
+            </a:extLst>
+          </a:blip>
+          <a:stretch>
+            <a:fillRect/>
+          </a:stretch>
+        </p:blipFill>
+        <p:spPr>
+          <a:xfrm>
+            <a:off x="8240634" y="4263728"/>
+            <a:ext cx="2452423" cy="2427184"/>
+          </a:xfrm>
+          <a:prstGeom prst="ellipse">
+            <a:avLst/>
+          </a:prstGeom>
+          <a:ln>
+            <a:noFill/>
+          </a:ln>
+          <a:effectLst>
+            <a:softEdge rad="112500"/>
+          </a:effectLst>
+        </p:spPr>
+      </p:pic>
     </p:spTree>
     <p:extLst>
       <p:ext uri="{BB962C8B-B14F-4D97-AF65-F5344CB8AC3E}">
-        <p14:creationId xmlns:p14="http://schemas.microsoft.com/office/powerpoint/2010/main" val="2823194359"/>
+        <p14:creationId xmlns:p14="http://schemas.microsoft.com/office/powerpoint/2010/main" val="3939565567"/>
       </p:ext>
     </p:extLst>
   </p:cSld>
@@ -6654,10 +5968,10 @@
       </p:grpSpPr>
       <p:pic>
         <p:nvPicPr>
-          <p:cNvPr id="5122" name="Picture 2" descr="Picture background">
-            <a:extLst>
-              <a:ext uri="{FF2B5EF4-FFF2-40B4-BE49-F238E27FC236}">
-                <a16:creationId xmlns:a16="http://schemas.microsoft.com/office/drawing/2014/main" id="{EF7AAAEF-0306-FF07-98E7-0EC4CD5B7B2F}"/>
+          <p:cNvPr id="6146" name="Picture 2" descr="Picture background">
+            <a:extLst>
+              <a:ext uri="{FF2B5EF4-FFF2-40B4-BE49-F238E27FC236}">
+                <a16:creationId xmlns:a16="http://schemas.microsoft.com/office/drawing/2014/main" id="{225C1529-B3DA-3984-055D-6C6612B977C2}"/>
               </a:ext>
             </a:extLst>
           </p:cNvPr>
@@ -6701,10 +6015,10 @@
       </p:pic>
       <p:sp>
         <p:nvSpPr>
-          <p:cNvPr id="4" name="TextBox 3">
-            <a:extLst>
-              <a:ext uri="{FF2B5EF4-FFF2-40B4-BE49-F238E27FC236}">
-                <a16:creationId xmlns:a16="http://schemas.microsoft.com/office/drawing/2014/main" id="{CEA7597A-A6A0-9678-03E1-38EFF8A52214}"/>
+          <p:cNvPr id="3" name="TextBox 2">
+            <a:extLst>
+              <a:ext uri="{FF2B5EF4-FFF2-40B4-BE49-F238E27FC236}">
+                <a16:creationId xmlns:a16="http://schemas.microsoft.com/office/drawing/2014/main" id="{E5B56C1E-15CA-6F7C-52D5-1C7357BE66E3}"/>
               </a:ext>
             </a:extLst>
           </p:cNvPr>
@@ -6713,8 +6027,8 @@
         </p:nvSpPr>
         <p:spPr>
           <a:xfrm>
-            <a:off x="266699" y="185868"/>
-            <a:ext cx="6096000" cy="769441"/>
+            <a:off x="167239" y="0"/>
+            <a:ext cx="6208294" cy="769441"/>
           </a:xfrm>
           <a:prstGeom prst="rect">
             <a:avLst/>
@@ -6731,17 +6045,17 @@
               <a:rPr lang="ru-RU" sz="4400" dirty="0">
                 <a:latin typeface="Bahnschrift SemiBold Condensed" panose="020B0502040204020203" pitchFamily="34" charset="0"/>
               </a:rPr>
-              <a:t>Актуальность</a:t>
-            </a:r>
-          </a:p>
-        </p:txBody>
-      </p:sp>
-      <p:sp>
-        <p:nvSpPr>
-          <p:cNvPr id="6" name="TextBox 5">
-            <a:extLst>
-              <a:ext uri="{FF2B5EF4-FFF2-40B4-BE49-F238E27FC236}">
-                <a16:creationId xmlns:a16="http://schemas.microsoft.com/office/drawing/2014/main" id="{646AAECF-7617-669F-6FFA-5ED87B19F2D8}"/>
+              <a:t>Область применения</a:t>
+            </a:r>
+          </a:p>
+        </p:txBody>
+      </p:sp>
+      <p:sp>
+        <p:nvSpPr>
+          <p:cNvPr id="5" name="TextBox 4">
+            <a:extLst>
+              <a:ext uri="{FF2B5EF4-FFF2-40B4-BE49-F238E27FC236}">
+                <a16:creationId xmlns:a16="http://schemas.microsoft.com/office/drawing/2014/main" id="{D3CA9A88-D1C9-99EA-92D9-B22A0FEAA1A7}"/>
               </a:ext>
             </a:extLst>
           </p:cNvPr>
@@ -6750,7 +6064,7 @@
         </p:nvSpPr>
         <p:spPr>
           <a:xfrm>
-            <a:off x="266699" y="756456"/>
+            <a:off x="167239" y="713302"/>
             <a:ext cx="6208294" cy="769441"/>
           </a:xfrm>
           <a:prstGeom prst="rect">
@@ -6767,19 +6081,19 @@
             <a:pPr rtl="0"/>
             <a:r>
               <a:rPr lang="ru-RU" sz="4400" dirty="0">
-                <a:latin typeface="Bahnschrift Condensed" panose="020B0502040204020203" pitchFamily="34" charset="0"/>
-              </a:rPr>
-              <a:t>Курсового проектирования</a:t>
-            </a:r>
-          </a:p>
-        </p:txBody>
-      </p:sp>
-      <p:sp>
-        <p:nvSpPr>
-          <p:cNvPr id="14" name="TextBox 13">
-            <a:extLst>
-              <a:ext uri="{FF2B5EF4-FFF2-40B4-BE49-F238E27FC236}">
-                <a16:creationId xmlns:a16="http://schemas.microsoft.com/office/drawing/2014/main" id="{8D36F160-A48E-60C8-07A2-53DF6E3BF7D5}"/>
+                <a:latin typeface="Bahnschrift SemiBold Condensed" panose="020B0502040204020203" pitchFamily="34" charset="0"/>
+              </a:rPr>
+              <a:t>Разработанной программы</a:t>
+            </a:r>
+          </a:p>
+        </p:txBody>
+      </p:sp>
+      <p:sp>
+        <p:nvSpPr>
+          <p:cNvPr id="7" name="TextBox 6">
+            <a:extLst>
+              <a:ext uri="{FF2B5EF4-FFF2-40B4-BE49-F238E27FC236}">
+                <a16:creationId xmlns:a16="http://schemas.microsoft.com/office/drawing/2014/main" id="{3F3E8CA9-6C25-A519-1FD5-71BA1FCA7DB2}"/>
               </a:ext>
             </a:extLst>
           </p:cNvPr>
@@ -6788,8 +6102,8 @@
         </p:nvSpPr>
         <p:spPr>
           <a:xfrm>
-            <a:off x="266698" y="1402591"/>
-            <a:ext cx="6474994" cy="5509200"/>
+            <a:off x="167239" y="1427631"/>
+            <a:ext cx="7210306" cy="5262979"/>
           </a:xfrm>
           <a:prstGeom prst="rect">
             <a:avLst/>
@@ -6802,54 +6116,37 @@
           </a:bodyPr>
           <a:lstStyle/>
           <a:p>
-            <a:r>
-              <a:rPr lang="ru-BY" sz="2200" dirty="0">
+            <a:pPr algn="just"/>
+            <a:r>
+              <a:rPr lang="ru-BY" sz="2800" dirty="0">
                 <a:latin typeface="Times New Roman" panose="02020603050405020304" pitchFamily="18" charset="0"/>
                 <a:cs typeface="Times New Roman" panose="02020603050405020304" pitchFamily="18" charset="0"/>
               </a:rPr>
-              <a:t>Актуальность курсового проектирования состоит в том, что в современном мире, несмотря на обилие готовых игровых движков и фреймворков, остаётся важной задачей понимание фундаментальных принципов работы компьютерной графики. Разработка игр с использованием низкоуровневых графических API, таких как </a:t>
-            </a:r>
-            <a:r>
-              <a:rPr lang="ru-BY" sz="2200" dirty="0" err="1">
+              <a:t>Область применения результатов данного исследования охватывает несколько сфер деятельности. В частности, результаты могут быть полезны в образовательных учреждениях в качестве демонстрационного материала при изучении основ разработки игровых приложений, работы с низкоуровневым графическим API </a:t>
+            </a:r>
+            <a:r>
+              <a:rPr lang="ru-BY" sz="2800" dirty="0" err="1">
                 <a:latin typeface="Times New Roman" panose="02020603050405020304" pitchFamily="18" charset="0"/>
                 <a:cs typeface="Times New Roman" panose="02020603050405020304" pitchFamily="18" charset="0"/>
               </a:rPr>
               <a:t>DirectDraw</a:t>
             </a:r>
             <a:r>
-              <a:rPr lang="ru-BY" sz="2200" dirty="0">
+              <a:rPr lang="ru-BY" sz="2800" dirty="0">
                 <a:latin typeface="Times New Roman" panose="02020603050405020304" pitchFamily="18" charset="0"/>
                 <a:cs typeface="Times New Roman" panose="02020603050405020304" pitchFamily="18" charset="0"/>
               </a:rPr>
-              <a:t>, позволяет детально разобраться в управлении видеопамятью, двойной буферизации, обработке столкновений и построении игрового цикла. В связи с этим, создание классической аркадной игры «Пинг-понг» на </a:t>
-            </a:r>
-            <a:r>
-              <a:rPr lang="ru-BY" sz="2200" dirty="0" err="1">
-                <a:latin typeface="Times New Roman" panose="02020603050405020304" pitchFamily="18" charset="0"/>
-                <a:cs typeface="Times New Roman" panose="02020603050405020304" pitchFamily="18" charset="0"/>
-              </a:rPr>
-              <a:t>DirectDraw</a:t>
-            </a:r>
-            <a:r>
-              <a:rPr lang="ru-BY" sz="2200" dirty="0">
-                <a:latin typeface="Times New Roman" panose="02020603050405020304" pitchFamily="18" charset="0"/>
-                <a:cs typeface="Times New Roman" panose="02020603050405020304" pitchFamily="18" charset="0"/>
-              </a:rPr>
-              <a:t> становится особенно значимой задачей, так как позволяет не только получить полноценный игровой продукт, но и сформировать глубокое понимание процессов, лежащих в основе современных графических библиотек.</a:t>
-            </a:r>
-            <a:endParaRPr lang="ru-RU" sz="2200" dirty="0">
-              <a:latin typeface="Times New Roman" panose="02020603050405020304" pitchFamily="18" charset="0"/>
-              <a:cs typeface="Times New Roman" panose="02020603050405020304" pitchFamily="18" charset="0"/>
-            </a:endParaRPr>
+              <a:t> и реализации физических моделей. Кроме того, программа может служить основой для дальнейших исследований в области моделирования физики отскока.</a:t>
+            </a:r>
           </a:p>
         </p:txBody>
       </p:sp>
       <p:pic>
         <p:nvPicPr>
-          <p:cNvPr id="5136" name="Picture 16" descr="Разработка программного обеспечения документы">
-            <a:extLst>
-              <a:ext uri="{FF2B5EF4-FFF2-40B4-BE49-F238E27FC236}">
-                <a16:creationId xmlns:a16="http://schemas.microsoft.com/office/drawing/2014/main" id="{4EF5C83C-EEEE-42FD-58CB-ABB592E5C7BD}"/>
+          <p:cNvPr id="6152" name="Picture 8">
+            <a:extLst>
+              <a:ext uri="{FF2B5EF4-FFF2-40B4-BE49-F238E27FC236}">
+                <a16:creationId xmlns:a16="http://schemas.microsoft.com/office/drawing/2014/main" id="{4636D228-8C4C-A6F3-74C9-1C6AFC8375A1}"/>
               </a:ext>
             </a:extLst>
           </p:cNvPr>
@@ -6873,8 +6170,8 @@
         </p:blipFill>
         <p:spPr bwMode="auto">
           <a:xfrm>
-            <a:off x="6741693" y="331808"/>
-            <a:ext cx="5183608" cy="3600112"/>
+            <a:off x="7620000" y="3928110"/>
+            <a:ext cx="4572000" cy="2929890"/>
           </a:xfrm>
           <a:prstGeom prst="rect">
             <a:avLst/>
@@ -6905,7 +6202,7 @@
           <p:cNvPr id="8" name="Рисунок 7">
             <a:extLst>
               <a:ext uri="{FF2B5EF4-FFF2-40B4-BE49-F238E27FC236}">
-                <a16:creationId xmlns:a16="http://schemas.microsoft.com/office/drawing/2014/main" id="{469CB28B-2440-FECB-F792-DF7BB987FC17}"/>
+                <a16:creationId xmlns:a16="http://schemas.microsoft.com/office/drawing/2014/main" id="{5635149A-6196-F6E6-EC28-990E9AC3C849}"/>
               </a:ext>
             </a:extLst>
           </p:cNvPr>
@@ -6928,7 +6225,7 @@
         </p:blipFill>
         <p:spPr>
           <a:xfrm>
-            <a:off x="8240634" y="4263728"/>
+            <a:off x="8558561" y="769441"/>
             <a:ext cx="2452423" cy="2427184"/>
           </a:xfrm>
           <a:prstGeom prst="ellipse">
@@ -6945,7 +6242,7 @@
     </p:spTree>
     <p:extLst>
       <p:ext uri="{BB962C8B-B14F-4D97-AF65-F5344CB8AC3E}">
-        <p14:creationId xmlns:p14="http://schemas.microsoft.com/office/powerpoint/2010/main" val="3939565567"/>
+        <p14:creationId xmlns:p14="http://schemas.microsoft.com/office/powerpoint/2010/main" val="3510283395"/>
       </p:ext>
     </p:extLst>
   </p:cSld>
@@ -7027,7 +6324,7 @@
           <p:cNvPr id="3" name="TextBox 2">
             <a:extLst>
               <a:ext uri="{FF2B5EF4-FFF2-40B4-BE49-F238E27FC236}">
-                <a16:creationId xmlns:a16="http://schemas.microsoft.com/office/drawing/2014/main" id="{E5B56C1E-15CA-6F7C-52D5-1C7357BE66E3}"/>
+                <a16:creationId xmlns:a16="http://schemas.microsoft.com/office/drawing/2014/main" id="{6BEE2177-CA50-4F6A-A194-52B0C0DAD256}"/>
               </a:ext>
             </a:extLst>
           </p:cNvPr>
@@ -7036,8 +6333,8 @@
         </p:nvSpPr>
         <p:spPr>
           <a:xfrm>
-            <a:off x="167239" y="0"/>
-            <a:ext cx="6208294" cy="769441"/>
+            <a:off x="173054" y="0"/>
+            <a:ext cx="6096000" cy="769441"/>
           </a:xfrm>
           <a:prstGeom prst="rect">
             <a:avLst/>
@@ -7054,7 +6351,7 @@
               <a:rPr lang="ru-RU" sz="4400" dirty="0">
                 <a:latin typeface="Bahnschrift SemiBold Condensed" panose="020B0502040204020203" pitchFamily="34" charset="0"/>
               </a:rPr>
-              <a:t>Область применения</a:t>
+              <a:t>Аналоги</a:t>
             </a:r>
           </a:p>
         </p:txBody>
@@ -7064,7 +6361,7 @@
           <p:cNvPr id="5" name="TextBox 4">
             <a:extLst>
               <a:ext uri="{FF2B5EF4-FFF2-40B4-BE49-F238E27FC236}">
-                <a16:creationId xmlns:a16="http://schemas.microsoft.com/office/drawing/2014/main" id="{D3CA9A88-D1C9-99EA-92D9-B22A0FEAA1A7}"/>
+                <a16:creationId xmlns:a16="http://schemas.microsoft.com/office/drawing/2014/main" id="{B0FDD35C-498E-2BB0-A32C-A95351258F07}"/>
               </a:ext>
             </a:extLst>
           </p:cNvPr>
@@ -7073,7 +6370,7 @@
         </p:nvSpPr>
         <p:spPr>
           <a:xfrm>
-            <a:off x="167239" y="713302"/>
+            <a:off x="116907" y="577496"/>
             <a:ext cx="6208294" cy="769441"/>
           </a:xfrm>
           <a:prstGeom prst="rect">
@@ -7087,7 +6384,6 @@
           </a:bodyPr>
           <a:lstStyle/>
           <a:p>
-            <a:pPr rtl="0"/>
             <a:r>
               <a:rPr lang="ru-RU" sz="4400" dirty="0">
                 <a:latin typeface="Bahnschrift SemiBold Condensed" panose="020B0502040204020203" pitchFamily="34" charset="0"/>
@@ -7099,10 +6395,10 @@
       </p:sp>
       <p:sp>
         <p:nvSpPr>
-          <p:cNvPr id="7" name="TextBox 6">
-            <a:extLst>
-              <a:ext uri="{FF2B5EF4-FFF2-40B4-BE49-F238E27FC236}">
-                <a16:creationId xmlns:a16="http://schemas.microsoft.com/office/drawing/2014/main" id="{3F3E8CA9-6C25-A519-1FD5-71BA1FCA7DB2}"/>
+          <p:cNvPr id="10" name="TextBox 9">
+            <a:extLst>
+              <a:ext uri="{FF2B5EF4-FFF2-40B4-BE49-F238E27FC236}">
+                <a16:creationId xmlns:a16="http://schemas.microsoft.com/office/drawing/2014/main" id="{03E99EA8-E253-0702-C081-6903527CB6C4}"/>
               </a:ext>
             </a:extLst>
           </p:cNvPr>
@@ -7111,8 +6407,8 @@
         </p:nvSpPr>
         <p:spPr>
           <a:xfrm>
-            <a:off x="167239" y="1427631"/>
-            <a:ext cx="7210306" cy="5262979"/>
+            <a:off x="173054" y="4137242"/>
+            <a:ext cx="5625073" cy="2585323"/>
           </a:xfrm>
           <a:prstGeom prst="rect">
             <a:avLst/>
@@ -7125,47 +6421,326 @@
           </a:bodyPr>
           <a:lstStyle/>
           <a:p>
-            <a:pPr algn="just"/>
-            <a:r>
-              <a:rPr lang="ru-BY" sz="2800" dirty="0">
+            <a:r>
+              <a:rPr lang="ru-BY" dirty="0">
                 <a:latin typeface="Times New Roman" panose="02020603050405020304" pitchFamily="18" charset="0"/>
                 <a:cs typeface="Times New Roman" panose="02020603050405020304" pitchFamily="18" charset="0"/>
               </a:rPr>
-              <a:t>Область применения результатов данного исследования охватывает несколько сфер деятельности. В частности, результаты могут быть полезны в образовательных учреждениях в качестве демонстрационного материала при изучении основ разработки игровых приложений, работы с низкоуровневым графическим API </a:t>
-            </a:r>
-            <a:r>
-              <a:rPr lang="ru-BY" sz="2800" dirty="0" err="1">
+              <a:t>Оригинальная аркадная игра, выпущенная в 1972 году. Представляет собой чёрно-белое изображение с двумя вертикальными линиями-ракетками, квадратным мячом и пунктирной линией по центру. Управление осуществляется аналоговыми ручками. К сильным сторонам относятся новаторство и простота, а также высокая вовлечённость в соревновательном режиме. Слабые стороны – отсутствие звука в первых версиях и примитивная физика, реализованная </a:t>
+            </a:r>
+            <a:r>
+              <a:rPr lang="ru-BY" dirty="0" err="1">
                 <a:latin typeface="Times New Roman" panose="02020603050405020304" pitchFamily="18" charset="0"/>
                 <a:cs typeface="Times New Roman" panose="02020603050405020304" pitchFamily="18" charset="0"/>
               </a:rPr>
-              <a:t>DirectDraw</a:t>
-            </a:r>
-            <a:r>
-              <a:rPr lang="ru-BY" sz="2800" dirty="0">
+              <a:t>аппаратно</a:t>
+            </a:r>
+            <a:r>
+              <a:rPr lang="ru-BY" dirty="0">
                 <a:latin typeface="Times New Roman" panose="02020603050405020304" pitchFamily="18" charset="0"/>
                 <a:cs typeface="Times New Roman" panose="02020603050405020304" pitchFamily="18" charset="0"/>
               </a:rPr>
-              <a:t> и реализации физических моделей. Кроме того, программа может служить основой для дальнейших исследований в области моделирования физики отскока.</a:t>
-            </a:r>
+              <a:t>.</a:t>
+            </a:r>
+            <a:endParaRPr lang="ru-RU" dirty="0">
+              <a:latin typeface="Times New Roman" panose="02020603050405020304" pitchFamily="18" charset="0"/>
+              <a:cs typeface="Times New Roman" panose="02020603050405020304" pitchFamily="18" charset="0"/>
+            </a:endParaRPr>
+          </a:p>
+        </p:txBody>
+      </p:sp>
+      <p:sp>
+        <p:nvSpPr>
+          <p:cNvPr id="14" name="TextBox 13">
+            <a:extLst>
+              <a:ext uri="{FF2B5EF4-FFF2-40B4-BE49-F238E27FC236}">
+                <a16:creationId xmlns:a16="http://schemas.microsoft.com/office/drawing/2014/main" id="{7506B8A7-FBDF-0399-E7BC-A78A132BD118}"/>
+              </a:ext>
+            </a:extLst>
+          </p:cNvPr>
+          <p:cNvSpPr txBox="1"/>
+          <p:nvPr/>
+        </p:nvSpPr>
+        <p:spPr>
+          <a:xfrm>
+            <a:off x="1584657" y="1542192"/>
+            <a:ext cx="2606341" cy="369332"/>
+          </a:xfrm>
+          <a:prstGeom prst="rect">
+            <a:avLst/>
+          </a:prstGeom>
+          <a:noFill/>
+        </p:spPr>
+        <p:txBody>
+          <a:bodyPr wrap="square">
+            <a:spAutoFit/>
+          </a:bodyPr>
+          <a:lstStyle/>
+          <a:p>
+            <a:pPr rtl="0"/>
+            <a:r>
+              <a:rPr lang="ru-RU" dirty="0">
+                <a:solidFill>
+                  <a:schemeClr val="accent1">
+                    <a:lumMod val="50000"/>
+                  </a:schemeClr>
+                </a:solidFill>
+                <a:effectLst>
+                  <a:outerShdw blurRad="38100" dist="38100" dir="2700000" algn="tl">
+                    <a:srgbClr val="000000">
+                      <a:alpha val="43137"/>
+                    </a:srgbClr>
+                  </a:outerShdw>
+                </a:effectLst>
+                <a:latin typeface="Bahnschrift SemiBold Condensed" panose="020B0502040204020203" pitchFamily="34" charset="0"/>
+              </a:rPr>
+              <a:t>Программа 1 – </a:t>
+            </a:r>
+            <a:r>
+              <a:rPr lang="en-US" dirty="0">
+                <a:solidFill>
+                  <a:schemeClr val="accent1">
+                    <a:lumMod val="50000"/>
+                  </a:schemeClr>
+                </a:solidFill>
+                <a:effectLst>
+                  <a:outerShdw blurRad="38100" dist="38100" dir="2700000" algn="tl">
+                    <a:srgbClr val="000000">
+                      <a:alpha val="43137"/>
+                    </a:srgbClr>
+                  </a:outerShdw>
+                </a:effectLst>
+                <a:latin typeface="Bahnschrift SemiBold Condensed" panose="020B0502040204020203" pitchFamily="34" charset="0"/>
+              </a:rPr>
+              <a:t>Pong (Atari)</a:t>
+            </a:r>
+            <a:endParaRPr lang="ru-RU" dirty="0">
+              <a:solidFill>
+                <a:schemeClr val="accent1">
+                  <a:lumMod val="50000"/>
+                </a:schemeClr>
+              </a:solidFill>
+              <a:effectLst>
+                <a:outerShdw blurRad="38100" dist="38100" dir="2700000" algn="tl">
+                  <a:srgbClr val="000000">
+                    <a:alpha val="43137"/>
+                  </a:srgbClr>
+                </a:outerShdw>
+              </a:effectLst>
+              <a:latin typeface="Bahnschrift SemiBold Condensed" panose="020B0502040204020203" pitchFamily="34" charset="0"/>
+            </a:endParaRPr>
+          </a:p>
+        </p:txBody>
+      </p:sp>
+      <p:sp>
+        <p:nvSpPr>
+          <p:cNvPr id="16" name="TextBox 15">
+            <a:extLst>
+              <a:ext uri="{FF2B5EF4-FFF2-40B4-BE49-F238E27FC236}">
+                <a16:creationId xmlns:a16="http://schemas.microsoft.com/office/drawing/2014/main" id="{B36817FA-5024-5EA6-9E1D-78EEA49B6A08}"/>
+              </a:ext>
+            </a:extLst>
+          </p:cNvPr>
+          <p:cNvSpPr txBox="1"/>
+          <p:nvPr/>
+        </p:nvSpPr>
+        <p:spPr>
+          <a:xfrm>
+            <a:off x="7413540" y="384720"/>
+            <a:ext cx="2750344" cy="369332"/>
+          </a:xfrm>
+          <a:prstGeom prst="rect">
+            <a:avLst/>
+          </a:prstGeom>
+          <a:noFill/>
+        </p:spPr>
+        <p:txBody>
+          <a:bodyPr wrap="square">
+            <a:spAutoFit/>
+          </a:bodyPr>
+          <a:lstStyle/>
+          <a:p>
+            <a:pPr rtl="0"/>
+            <a:r>
+              <a:rPr lang="ru-RU" dirty="0">
+                <a:solidFill>
+                  <a:schemeClr val="accent1">
+                    <a:lumMod val="50000"/>
+                  </a:schemeClr>
+                </a:solidFill>
+                <a:effectLst>
+                  <a:outerShdw blurRad="38100" dist="38100" dir="2700000" algn="tl">
+                    <a:srgbClr val="000000">
+                      <a:alpha val="43137"/>
+                    </a:srgbClr>
+                  </a:outerShdw>
+                </a:effectLst>
+                <a:latin typeface="Bahnschrift SemiBold Condensed" panose="020B0502040204020203" pitchFamily="34" charset="0"/>
+              </a:rPr>
+              <a:t>Программа </a:t>
+            </a:r>
+            <a:r>
+              <a:rPr lang="en-US" dirty="0">
+                <a:solidFill>
+                  <a:schemeClr val="accent1">
+                    <a:lumMod val="50000"/>
+                  </a:schemeClr>
+                </a:solidFill>
+                <a:effectLst>
+                  <a:outerShdw blurRad="38100" dist="38100" dir="2700000" algn="tl">
+                    <a:srgbClr val="000000">
+                      <a:alpha val="43137"/>
+                    </a:srgbClr>
+                  </a:outerShdw>
+                </a:effectLst>
+                <a:latin typeface="Bahnschrift SemiBold Condensed" panose="020B0502040204020203" pitchFamily="34" charset="0"/>
+              </a:rPr>
+              <a:t>2</a:t>
+            </a:r>
+            <a:r>
+              <a:rPr lang="ru-RU" dirty="0">
+                <a:solidFill>
+                  <a:schemeClr val="accent1">
+                    <a:lumMod val="50000"/>
+                  </a:schemeClr>
+                </a:solidFill>
+                <a:effectLst>
+                  <a:outerShdw blurRad="38100" dist="38100" dir="2700000" algn="tl">
+                    <a:srgbClr val="000000">
+                      <a:alpha val="43137"/>
+                    </a:srgbClr>
+                  </a:outerShdw>
+                </a:effectLst>
+                <a:latin typeface="Bahnschrift SemiBold Condensed" panose="020B0502040204020203" pitchFamily="34" charset="0"/>
+              </a:rPr>
+              <a:t> – </a:t>
+            </a:r>
+            <a:r>
+              <a:rPr lang="en-US" dirty="0" err="1">
+                <a:solidFill>
+                  <a:schemeClr val="accent1">
+                    <a:lumMod val="50000"/>
+                  </a:schemeClr>
+                </a:solidFill>
+                <a:effectLst>
+                  <a:outerShdw blurRad="38100" dist="38100" dir="2700000" algn="tl">
+                    <a:srgbClr val="000000">
+                      <a:alpha val="43137"/>
+                    </a:srgbClr>
+                  </a:outerShdw>
+                </a:effectLst>
+                <a:latin typeface="Bahnschrift SemiBold Condensed" panose="020B0502040204020203" pitchFamily="34" charset="0"/>
+              </a:rPr>
+              <a:t>Arkanoid</a:t>
+            </a:r>
+            <a:r>
+              <a:rPr lang="en-US" dirty="0">
+                <a:solidFill>
+                  <a:schemeClr val="accent1">
+                    <a:lumMod val="50000"/>
+                  </a:schemeClr>
+                </a:solidFill>
+                <a:effectLst>
+                  <a:outerShdw blurRad="38100" dist="38100" dir="2700000" algn="tl">
+                    <a:srgbClr val="000000">
+                      <a:alpha val="43137"/>
+                    </a:srgbClr>
+                  </a:outerShdw>
+                </a:effectLst>
+                <a:latin typeface="Bahnschrift SemiBold Condensed" panose="020B0502040204020203" pitchFamily="34" charset="0"/>
+              </a:rPr>
+              <a:t> (Taito)</a:t>
+            </a:r>
+            <a:endParaRPr lang="ru-RU" dirty="0">
+              <a:solidFill>
+                <a:schemeClr val="accent1">
+                  <a:lumMod val="50000"/>
+                </a:schemeClr>
+              </a:solidFill>
+              <a:effectLst>
+                <a:outerShdw blurRad="38100" dist="38100" dir="2700000" algn="tl">
+                  <a:srgbClr val="000000">
+                    <a:alpha val="43137"/>
+                  </a:srgbClr>
+                </a:outerShdw>
+              </a:effectLst>
+              <a:latin typeface="Bahnschrift SemiBold Condensed" panose="020B0502040204020203" pitchFamily="34" charset="0"/>
+            </a:endParaRPr>
+          </a:p>
+        </p:txBody>
+      </p:sp>
+      <p:sp>
+        <p:nvSpPr>
+          <p:cNvPr id="18" name="TextBox 17">
+            <a:extLst>
+              <a:ext uri="{FF2B5EF4-FFF2-40B4-BE49-F238E27FC236}">
+                <a16:creationId xmlns:a16="http://schemas.microsoft.com/office/drawing/2014/main" id="{EF03A9AC-1227-89B1-2DE5-76E2A0CF3AA3}"/>
+              </a:ext>
+            </a:extLst>
+          </p:cNvPr>
+          <p:cNvSpPr txBox="1"/>
+          <p:nvPr/>
+        </p:nvSpPr>
+        <p:spPr>
+          <a:xfrm>
+            <a:off x="6096000" y="3927295"/>
+            <a:ext cx="6096000" cy="2862322"/>
+          </a:xfrm>
+          <a:prstGeom prst="rect">
+            <a:avLst/>
+          </a:prstGeom>
+          <a:noFill/>
+        </p:spPr>
+        <p:txBody>
+          <a:bodyPr wrap="square">
+            <a:spAutoFit/>
+          </a:bodyPr>
+          <a:lstStyle/>
+          <a:p>
+            <a:r>
+              <a:rPr lang="ru-BY" dirty="0">
+                <a:latin typeface="Times New Roman" panose="02020603050405020304" pitchFamily="18" charset="0"/>
+                <a:cs typeface="Times New Roman" panose="02020603050405020304" pitchFamily="18" charset="0"/>
+              </a:rPr>
+              <a:t>Классический </a:t>
+            </a:r>
+            <a:r>
+              <a:rPr lang="ru-BY" dirty="0" err="1">
+                <a:latin typeface="Times New Roman" panose="02020603050405020304" pitchFamily="18" charset="0"/>
+                <a:cs typeface="Times New Roman" panose="02020603050405020304" pitchFamily="18" charset="0"/>
+              </a:rPr>
+              <a:t>арканоид</a:t>
+            </a:r>
+            <a:r>
+              <a:rPr lang="ru-BY" dirty="0">
+                <a:latin typeface="Times New Roman" panose="02020603050405020304" pitchFamily="18" charset="0"/>
+                <a:cs typeface="Times New Roman" panose="02020603050405020304" pitchFamily="18" charset="0"/>
+              </a:rPr>
+              <a:t>, выпущенный в 1986 году, являющийся наследником пинг-понга. Игрок управляет платформой в нижней части экрана, а мяч отбивается о блоки, при разрушении которых появляются бонусы. Сильными сторонами являются разнообразие геймплея, включающее блоки и бонусы, более сложная физика отскока от разных поверхностей и затягивающий игровой процесс. Слабые стороны относительно классического пинг-понга – только одиночный режим и отсутствие соревновательного аспекта.</a:t>
+            </a:r>
+            <a:endParaRPr lang="ru-RU" dirty="0">
+              <a:latin typeface="Times New Roman" panose="02020603050405020304" pitchFamily="18" charset="0"/>
+              <a:cs typeface="Times New Roman" panose="02020603050405020304" pitchFamily="18" charset="0"/>
+            </a:endParaRPr>
           </a:p>
         </p:txBody>
       </p:sp>
       <p:pic>
         <p:nvPicPr>
-          <p:cNvPr id="6152" name="Picture 8">
-            <a:extLst>
-              <a:ext uri="{FF2B5EF4-FFF2-40B4-BE49-F238E27FC236}">
-                <a16:creationId xmlns:a16="http://schemas.microsoft.com/office/drawing/2014/main" id="{4636D228-8C4C-A6F3-74C9-1C6AFC8375A1}"/>
+          <p:cNvPr id="2" name="Рисунок 1" descr="Pong был скучным, а люди его любили / Хабр">
+            <a:extLst>
+              <a:ext uri="{FF2B5EF4-FFF2-40B4-BE49-F238E27FC236}">
+                <a16:creationId xmlns:a16="http://schemas.microsoft.com/office/drawing/2014/main" id="{12D2013F-7905-825E-76EC-1F5FD28F3079}"/>
               </a:ext>
             </a:extLst>
           </p:cNvPr>
           <p:cNvPicPr>
-            <a:picLocks noChangeAspect="1" noChangeArrowheads="1"/>
+            <a:picLocks noChangeAspect="1"/>
           </p:cNvPicPr>
           <p:nvPr/>
         </p:nvPicPr>
         <p:blipFill>
-          <a:blip r:embed="rId3">
+          <a:blip r:embed="rId3" cstate="print">
             <a:extLst>
               <a:ext uri="{28A0092B-C50C-407E-A947-70E740481C1C}">
                 <a14:useLocalDpi xmlns:a14="http://schemas.microsoft.com/office/drawing/2010/main" val="0"/>
@@ -7179,39 +6754,24 @@
         </p:blipFill>
         <p:spPr bwMode="auto">
           <a:xfrm>
-            <a:off x="7620000" y="3928110"/>
-            <a:ext cx="4572000" cy="2929890"/>
+            <a:off x="966499" y="2028022"/>
+            <a:ext cx="3532765" cy="1992722"/>
           </a:xfrm>
           <a:prstGeom prst="rect">
             <a:avLst/>
           </a:prstGeom>
+          <a:noFill/>
           <a:ln>
             <a:noFill/>
           </a:ln>
-          <a:effectLst>
-            <a:outerShdw blurRad="292100" dist="139700" dir="2700000" algn="tl" rotWithShape="0">
-              <a:srgbClr val="333333">
-                <a:alpha val="65000"/>
-              </a:srgbClr>
-            </a:outerShdw>
-          </a:effectLst>
-          <a:extLst>
-            <a:ext uri="{909E8E84-426E-40DD-AFC4-6F175D3DCCD1}">
-              <a14:hiddenFill xmlns:a14="http://schemas.microsoft.com/office/drawing/2010/main">
-                <a:solidFill>
-                  <a:srgbClr val="FFFFFF"/>
-                </a:solidFill>
-              </a14:hiddenFill>
-            </a:ext>
-          </a:extLst>
         </p:spPr>
       </p:pic>
       <p:pic>
         <p:nvPicPr>
-          <p:cNvPr id="8" name="Рисунок 7">
-            <a:extLst>
-              <a:ext uri="{FF2B5EF4-FFF2-40B4-BE49-F238E27FC236}">
-                <a16:creationId xmlns:a16="http://schemas.microsoft.com/office/drawing/2014/main" id="{5635149A-6196-F6E6-EC28-990E9AC3C849}"/>
+          <p:cNvPr id="4" name="Рисунок 3" descr="Arkanoid — Википедия">
+            <a:extLst>
+              <a:ext uri="{FF2B5EF4-FFF2-40B4-BE49-F238E27FC236}">
+                <a16:creationId xmlns:a16="http://schemas.microsoft.com/office/drawing/2014/main" id="{5A63C168-4EB0-4313-6ED0-562691A1AAD3}"/>
               </a:ext>
             </a:extLst>
           </p:cNvPr>
@@ -7228,30 +6788,31 @@
               </a:ext>
             </a:extLst>
           </a:blip>
+          <a:srcRect/>
           <a:stretch>
             <a:fillRect/>
           </a:stretch>
         </p:blipFill>
-        <p:spPr>
-          <a:xfrm>
-            <a:off x="8558561" y="769441"/>
-            <a:ext cx="2452423" cy="2427184"/>
-          </a:xfrm>
-          <a:prstGeom prst="ellipse">
+        <p:spPr bwMode="auto">
+          <a:xfrm>
+            <a:off x="7251724" y="878173"/>
+            <a:ext cx="3073977" cy="2881853"/>
+          </a:xfrm>
+          <a:prstGeom prst="rect">
             <a:avLst/>
           </a:prstGeom>
+          <a:noFill/>
           <a:ln>
-            <a:noFill/>
+            <a:solidFill>
+              <a:schemeClr val="tx1"/>
+            </a:solidFill>
           </a:ln>
-          <a:effectLst>
-            <a:softEdge rad="112500"/>
-          </a:effectLst>
         </p:spPr>
       </p:pic>
     </p:spTree>
     <p:extLst>
       <p:ext uri="{BB962C8B-B14F-4D97-AF65-F5344CB8AC3E}">
-        <p14:creationId xmlns:p14="http://schemas.microsoft.com/office/powerpoint/2010/main" val="3510283395"/>
+        <p14:creationId xmlns:p14="http://schemas.microsoft.com/office/powerpoint/2010/main" val="4081661009"/>
       </p:ext>
     </p:extLst>
   </p:cSld>
@@ -7296,7 +6857,7 @@
           <p:nvPr/>
         </p:nvPicPr>
         <p:blipFill>
-          <a:blip r:embed="rId2">
+          <a:blip r:embed="rId3">
             <a:extLst>
               <a:ext uri="{28A0092B-C50C-407E-A947-70E740481C1C}">
                 <a14:useLocalDpi xmlns:a14="http://schemas.microsoft.com/office/drawing/2010/main" val="0"/>
@@ -7330,10 +6891,10 @@
       </p:pic>
       <p:sp>
         <p:nvSpPr>
-          <p:cNvPr id="3" name="TextBox 2">
-            <a:extLst>
-              <a:ext uri="{FF2B5EF4-FFF2-40B4-BE49-F238E27FC236}">
-                <a16:creationId xmlns:a16="http://schemas.microsoft.com/office/drawing/2014/main" id="{6BEE2177-CA50-4F6A-A194-52B0C0DAD256}"/>
+          <p:cNvPr id="4" name="TextBox 3">
+            <a:extLst>
+              <a:ext uri="{FF2B5EF4-FFF2-40B4-BE49-F238E27FC236}">
+                <a16:creationId xmlns:a16="http://schemas.microsoft.com/office/drawing/2014/main" id="{D7937A3C-5B5F-3BD5-8E6B-4265B0D6EB56}"/>
               </a:ext>
             </a:extLst>
           </p:cNvPr>
@@ -7342,138 +6903,8 @@
         </p:nvSpPr>
         <p:spPr>
           <a:xfrm>
-            <a:off x="173054" y="0"/>
-            <a:ext cx="6096000" cy="769441"/>
-          </a:xfrm>
-          <a:prstGeom prst="rect">
-            <a:avLst/>
-          </a:prstGeom>
-          <a:noFill/>
-        </p:spPr>
-        <p:txBody>
-          <a:bodyPr wrap="square">
-            <a:spAutoFit/>
-          </a:bodyPr>
-          <a:lstStyle/>
-          <a:p>
-            <a:r>
-              <a:rPr lang="ru-RU" sz="4400" dirty="0">
-                <a:latin typeface="Bahnschrift SemiBold Condensed" panose="020B0502040204020203" pitchFamily="34" charset="0"/>
-              </a:rPr>
-              <a:t>Аналоги</a:t>
-            </a:r>
-          </a:p>
-        </p:txBody>
-      </p:sp>
-      <p:sp>
-        <p:nvSpPr>
-          <p:cNvPr id="5" name="TextBox 4">
-            <a:extLst>
-              <a:ext uri="{FF2B5EF4-FFF2-40B4-BE49-F238E27FC236}">
-                <a16:creationId xmlns:a16="http://schemas.microsoft.com/office/drawing/2014/main" id="{B0FDD35C-498E-2BB0-A32C-A95351258F07}"/>
-              </a:ext>
-            </a:extLst>
-          </p:cNvPr>
-          <p:cNvSpPr txBox="1"/>
-          <p:nvPr/>
-        </p:nvSpPr>
-        <p:spPr>
-          <a:xfrm>
-            <a:off x="116907" y="577496"/>
-            <a:ext cx="6208294" cy="769441"/>
-          </a:xfrm>
-          <a:prstGeom prst="rect">
-            <a:avLst/>
-          </a:prstGeom>
-          <a:noFill/>
-        </p:spPr>
-        <p:txBody>
-          <a:bodyPr wrap="square">
-            <a:spAutoFit/>
-          </a:bodyPr>
-          <a:lstStyle/>
-          <a:p>
-            <a:r>
-              <a:rPr lang="ru-RU" sz="4400" dirty="0">
-                <a:latin typeface="Bahnschrift SemiBold Condensed" panose="020B0502040204020203" pitchFamily="34" charset="0"/>
-              </a:rPr>
-              <a:t>Разработанной программы</a:t>
-            </a:r>
-          </a:p>
-        </p:txBody>
-      </p:sp>
-      <p:sp>
-        <p:nvSpPr>
-          <p:cNvPr id="10" name="TextBox 9">
-            <a:extLst>
-              <a:ext uri="{FF2B5EF4-FFF2-40B4-BE49-F238E27FC236}">
-                <a16:creationId xmlns:a16="http://schemas.microsoft.com/office/drawing/2014/main" id="{03E99EA8-E253-0702-C081-6903527CB6C4}"/>
-              </a:ext>
-            </a:extLst>
-          </p:cNvPr>
-          <p:cNvSpPr txBox="1"/>
-          <p:nvPr/>
-        </p:nvSpPr>
-        <p:spPr>
-          <a:xfrm>
-            <a:off x="173054" y="4137242"/>
-            <a:ext cx="5625073" cy="2585323"/>
-          </a:xfrm>
-          <a:prstGeom prst="rect">
-            <a:avLst/>
-          </a:prstGeom>
-          <a:noFill/>
-        </p:spPr>
-        <p:txBody>
-          <a:bodyPr wrap="square">
-            <a:spAutoFit/>
-          </a:bodyPr>
-          <a:lstStyle/>
-          <a:p>
-            <a:r>
-              <a:rPr lang="ru-BY" dirty="0">
-                <a:latin typeface="Times New Roman" panose="02020603050405020304" pitchFamily="18" charset="0"/>
-                <a:cs typeface="Times New Roman" panose="02020603050405020304" pitchFamily="18" charset="0"/>
-              </a:rPr>
-              <a:t>Оригинальная аркадная игра, выпущенная в 1972 году. Представляет собой чёрно-белое изображение с двумя вертикальными линиями-ракетками, квадратным мячом и пунктирной линией по центру. Управление осуществляется аналоговыми ручками. К сильным сторонам относятся новаторство и простота, а также высокая вовлечённость в соревновательном режиме. Слабые стороны – отсутствие звука в первых версиях и примитивная физика, реализованная </a:t>
-            </a:r>
-            <a:r>
-              <a:rPr lang="ru-BY" dirty="0" err="1">
-                <a:latin typeface="Times New Roman" panose="02020603050405020304" pitchFamily="18" charset="0"/>
-                <a:cs typeface="Times New Roman" panose="02020603050405020304" pitchFamily="18" charset="0"/>
-              </a:rPr>
-              <a:t>аппаратно</a:t>
-            </a:r>
-            <a:r>
-              <a:rPr lang="ru-BY" dirty="0">
-                <a:latin typeface="Times New Roman" panose="02020603050405020304" pitchFamily="18" charset="0"/>
-                <a:cs typeface="Times New Roman" panose="02020603050405020304" pitchFamily="18" charset="0"/>
-              </a:rPr>
-              <a:t>.</a:t>
-            </a:r>
-            <a:endParaRPr lang="ru-RU" dirty="0">
-              <a:latin typeface="Times New Roman" panose="02020603050405020304" pitchFamily="18" charset="0"/>
-              <a:cs typeface="Times New Roman" panose="02020603050405020304" pitchFamily="18" charset="0"/>
-            </a:endParaRPr>
-          </a:p>
-        </p:txBody>
-      </p:sp>
-      <p:sp>
-        <p:nvSpPr>
-          <p:cNvPr id="14" name="TextBox 13">
-            <a:extLst>
-              <a:ext uri="{FF2B5EF4-FFF2-40B4-BE49-F238E27FC236}">
-                <a16:creationId xmlns:a16="http://schemas.microsoft.com/office/drawing/2014/main" id="{7506B8A7-FBDF-0399-E7BC-A78A132BD118}"/>
-              </a:ext>
-            </a:extLst>
-          </p:cNvPr>
-          <p:cNvSpPr txBox="1"/>
-          <p:nvPr/>
-        </p:nvSpPr>
-        <p:spPr>
-          <a:xfrm>
-            <a:off x="1584657" y="1542192"/>
-            <a:ext cx="2606341" cy="369332"/>
+            <a:off x="1165383" y="329577"/>
+            <a:ext cx="3348037" cy="369332"/>
           </a:xfrm>
           <a:prstGeom prst="rect">
             <a:avLst/>
@@ -7503,7 +6934,7 @@
                 </a:effectLst>
                 <a:latin typeface="Bahnschrift SemiBold Condensed" panose="020B0502040204020203" pitchFamily="34" charset="0"/>
               </a:rPr>
-              <a:t>Программа 1 – </a:t>
+              <a:t>Программа </a:t>
             </a:r>
             <a:r>
               <a:rPr lang="en-US" dirty="0">
@@ -7521,7 +6952,43 @@
                 </a:effectLst>
                 <a:latin typeface="Bahnschrift SemiBold Condensed" panose="020B0502040204020203" pitchFamily="34" charset="0"/>
               </a:rPr>
-              <a:t>Pong (Atari)</a:t>
+              <a:t>3</a:t>
+            </a:r>
+            <a:r>
+              <a:rPr lang="ru-RU" dirty="0">
+                <a:solidFill>
+                  <a:schemeClr val="accent1">
+                    <a:lumMod val="50000"/>
+                  </a:schemeClr>
+                </a:solidFill>
+                <a:effectLst>
+                  <a:outerShdw blurRad="38100" dist="38100" dir="2700000" algn="tl">
+                    <a:srgbClr val="000000">
+                      <a:alpha val="43137"/>
+                    </a:srgbClr>
+                  </a:outerShdw>
+                </a:effectLst>
+                <a:latin typeface="Bahnschrift SemiBold Condensed" panose="020B0502040204020203" pitchFamily="34" charset="0"/>
+              </a:rPr>
+              <a:t> – </a:t>
+            </a:r>
+            <a:r>
+              <a:rPr lang="en-US" dirty="0">
+                <a:solidFill>
+                  <a:schemeClr val="accent1">
+                    <a:lumMod val="50000"/>
+                  </a:schemeClr>
+                </a:solidFill>
+                <a:effectLst>
+                  <a:outerShdw blurRad="38100" dist="38100" dir="2700000" algn="tl">
+                    <a:srgbClr val="000000">
+                      <a:alpha val="43137"/>
+                    </a:srgbClr>
+                  </a:outerShdw>
+                </a:effectLst>
+                <a:latin typeface="Bahnschrift SemiBold Condensed" panose="020B0502040204020203" pitchFamily="34" charset="0"/>
+              </a:rPr>
+              <a:t>Pong Masters (mobile)</a:t>
             </a:r>
             <a:endParaRPr lang="ru-RU" dirty="0">
               <a:solidFill>
@@ -7543,10 +7010,10 @@
       </p:sp>
       <p:sp>
         <p:nvSpPr>
-          <p:cNvPr id="16" name="TextBox 15">
-            <a:extLst>
-              <a:ext uri="{FF2B5EF4-FFF2-40B4-BE49-F238E27FC236}">
-                <a16:creationId xmlns:a16="http://schemas.microsoft.com/office/drawing/2014/main" id="{B36817FA-5024-5EA6-9E1D-78EEA49B6A08}"/>
+          <p:cNvPr id="6" name="TextBox 5">
+            <a:extLst>
+              <a:ext uri="{FF2B5EF4-FFF2-40B4-BE49-F238E27FC236}">
+                <a16:creationId xmlns:a16="http://schemas.microsoft.com/office/drawing/2014/main" id="{7C771584-AA41-BE1D-A818-9872DC171AB3}"/>
               </a:ext>
             </a:extLst>
           </p:cNvPr>
@@ -7555,8 +7022,8 @@
         </p:nvSpPr>
         <p:spPr>
           <a:xfrm>
-            <a:off x="7413540" y="384720"/>
-            <a:ext cx="2750344" cy="369332"/>
+            <a:off x="7377545" y="329577"/>
+            <a:ext cx="3233305" cy="369332"/>
           </a:xfrm>
           <a:prstGeom prst="rect">
             <a:avLst/>
@@ -7604,7 +7071,7 @@
                 </a:effectLst>
                 <a:latin typeface="Bahnschrift SemiBold Condensed" panose="020B0502040204020203" pitchFamily="34" charset="0"/>
               </a:rPr>
-              <a:t>2</a:t>
+              <a:t>4</a:t>
             </a:r>
             <a:r>
               <a:rPr lang="ru-RU" dirty="0">
@@ -7625,24 +7092,6 @@
               <a:t> – </a:t>
             </a:r>
             <a:r>
-              <a:rPr lang="en-US" dirty="0" err="1">
-                <a:solidFill>
-                  <a:schemeClr val="accent1">
-                    <a:lumMod val="50000"/>
-                  </a:schemeClr>
-                </a:solidFill>
-                <a:effectLst>
-                  <a:outerShdw blurRad="38100" dist="38100" dir="2700000" algn="tl">
-                    <a:srgbClr val="000000">
-                      <a:alpha val="43137"/>
-                    </a:srgbClr>
-                  </a:outerShdw>
-                </a:effectLst>
-                <a:latin typeface="Bahnschrift SemiBold Condensed" panose="020B0502040204020203" pitchFamily="34" charset="0"/>
-              </a:rPr>
-              <a:t>Arkanoid</a:t>
-            </a:r>
-            <a:r>
               <a:rPr lang="en-US" dirty="0">
                 <a:solidFill>
                   <a:schemeClr val="accent1">
@@ -7658,7 +7107,43 @@
                 </a:effectLst>
                 <a:latin typeface="Bahnschrift SemiBold Condensed" panose="020B0502040204020203" pitchFamily="34" charset="0"/>
               </a:rPr>
-              <a:t> (Taito)</a:t>
+              <a:t>Pong Classic (</a:t>
+            </a:r>
+            <a:r>
+              <a:rPr lang="ru-RU" dirty="0">
+                <a:solidFill>
+                  <a:schemeClr val="accent1">
+                    <a:lumMod val="50000"/>
+                  </a:schemeClr>
+                </a:solidFill>
+                <a:effectLst>
+                  <a:outerShdw blurRad="38100" dist="38100" dir="2700000" algn="tl">
+                    <a:srgbClr val="000000">
+                      <a:alpha val="43137"/>
+                    </a:srgbClr>
+                  </a:outerShdw>
+                </a:effectLst>
+                <a:latin typeface="Bahnschrift SemiBold Condensed" panose="020B0502040204020203" pitchFamily="34" charset="0"/>
+              </a:rPr>
+              <a:t>Яндекс</a:t>
+            </a:r>
+            <a:r>
+              <a:rPr lang="en-US" dirty="0">
+                <a:solidFill>
+                  <a:schemeClr val="accent1">
+                    <a:lumMod val="50000"/>
+                  </a:schemeClr>
+                </a:solidFill>
+                <a:effectLst>
+                  <a:outerShdw blurRad="38100" dist="38100" dir="2700000" algn="tl">
+                    <a:srgbClr val="000000">
+                      <a:alpha val="43137"/>
+                    </a:srgbClr>
+                  </a:outerShdw>
+                </a:effectLst>
+                <a:latin typeface="Bahnschrift SemiBold Condensed" panose="020B0502040204020203" pitchFamily="34" charset="0"/>
+              </a:rPr>
+              <a:t>)</a:t>
             </a:r>
             <a:endParaRPr lang="ru-RU" dirty="0">
               <a:solidFill>
@@ -7680,10 +7165,10 @@
       </p:sp>
       <p:sp>
         <p:nvSpPr>
-          <p:cNvPr id="18" name="TextBox 17">
-            <a:extLst>
-              <a:ext uri="{FF2B5EF4-FFF2-40B4-BE49-F238E27FC236}">
-                <a16:creationId xmlns:a16="http://schemas.microsoft.com/office/drawing/2014/main" id="{EF03A9AC-1227-89B1-2DE5-76E2A0CF3AA3}"/>
+          <p:cNvPr id="16" name="TextBox 15">
+            <a:extLst>
+              <a:ext uri="{FF2B5EF4-FFF2-40B4-BE49-F238E27FC236}">
+                <a16:creationId xmlns:a16="http://schemas.microsoft.com/office/drawing/2014/main" id="{CDDEE9EB-50E3-EFE7-08CD-F8573B593AE6}"/>
               </a:ext>
             </a:extLst>
           </p:cNvPr>
@@ -7692,8 +7177,8 @@
         </p:nvSpPr>
         <p:spPr>
           <a:xfrm>
-            <a:off x="6096000" y="3927295"/>
-            <a:ext cx="6096000" cy="2862322"/>
+            <a:off x="269773" y="4341908"/>
+            <a:ext cx="5464493" cy="2031325"/>
           </a:xfrm>
           <a:prstGeom prst="rect">
             <a:avLst/>
@@ -7711,21 +7196,7 @@
                 <a:latin typeface="Times New Roman" panose="02020603050405020304" pitchFamily="18" charset="0"/>
                 <a:cs typeface="Times New Roman" panose="02020603050405020304" pitchFamily="18" charset="0"/>
               </a:rPr>
-              <a:t>Классический </a:t>
-            </a:r>
-            <a:r>
-              <a:rPr lang="ru-BY" dirty="0" err="1">
-                <a:latin typeface="Times New Roman" panose="02020603050405020304" pitchFamily="18" charset="0"/>
-                <a:cs typeface="Times New Roman" panose="02020603050405020304" pitchFamily="18" charset="0"/>
-              </a:rPr>
-              <a:t>арканоид</a:t>
-            </a:r>
-            <a:r>
-              <a:rPr lang="ru-BY" dirty="0">
-                <a:latin typeface="Times New Roman" panose="02020603050405020304" pitchFamily="18" charset="0"/>
-                <a:cs typeface="Times New Roman" panose="02020603050405020304" pitchFamily="18" charset="0"/>
-              </a:rPr>
-              <a:t>, выпущенный в 1986 году, являющийся наследником пинг-понга. Игрок управляет платформой в нижней части экрана, а мяч отбивается о блоки, при разрушении которых появляются бонусы. Сильными сторонами являются разнообразие геймплея, включающее блоки и бонусы, более сложная физика отскока от разных поверхностей и затягивающий игровой процесс. Слабые стороны относительно классического пинг-понга – только одиночный режим и отсутствие соревновательного аспекта.</a:t>
+              <a:t>Современные мобильные игры, отличающиеся простой графикой, управлением касанием и бесплатным распространением с рекламой. Сильные стороны – доступность и простота управления для сенсорных экранов. К слабым сторонам относятся примитивная физика, наличие рекламы и микротранзакций, а также отсутствие глубины.</a:t>
             </a:r>
             <a:endParaRPr lang="ru-RU" dirty="0">
               <a:latin typeface="Times New Roman" panose="02020603050405020304" pitchFamily="18" charset="0"/>
@@ -7734,12 +7205,54 @@
           </a:p>
         </p:txBody>
       </p:sp>
+      <p:sp>
+        <p:nvSpPr>
+          <p:cNvPr id="18" name="TextBox 17">
+            <a:extLst>
+              <a:ext uri="{FF2B5EF4-FFF2-40B4-BE49-F238E27FC236}">
+                <a16:creationId xmlns:a16="http://schemas.microsoft.com/office/drawing/2014/main" id="{2759F956-07D7-40C9-4B85-46ECB378B6D4}"/>
+              </a:ext>
+            </a:extLst>
+          </p:cNvPr>
+          <p:cNvSpPr txBox="1"/>
+          <p:nvPr/>
+        </p:nvSpPr>
+        <p:spPr>
+          <a:xfrm>
+            <a:off x="6004038" y="3789339"/>
+            <a:ext cx="6187962" cy="2862322"/>
+          </a:xfrm>
+          <a:prstGeom prst="rect">
+            <a:avLst/>
+          </a:prstGeom>
+          <a:noFill/>
+        </p:spPr>
+        <p:txBody>
+          <a:bodyPr wrap="square">
+            <a:spAutoFit/>
+          </a:bodyPr>
+          <a:lstStyle/>
+          <a:p>
+            <a:r>
+              <a:rPr lang="ru-BY" dirty="0">
+                <a:latin typeface="Times New Roman" panose="02020603050405020304" pitchFamily="18" charset="0"/>
+                <a:cs typeface="Times New Roman" panose="02020603050405020304" pitchFamily="18" charset="0"/>
+              </a:rPr>
+              <a:t>Браузерная игра, доступная на платформе Яндекс Игры. Представляет собой минималистичную двумерную версию с двумя ракетками, мячом и цифровым табло. Управление осуществляется клавишами W/S и стрелками. Доступен режим против компьютера. Сильные стороны – запуск в браузере без установки, понятное управление, наличие ИИ и таблица рекордов. Слабые стороны – примитивная физика (угол отскока не меняется), отсутствие звука, рекламные вставки, отсутствие настройки сложности ИИ и невозможность сетевой игры.</a:t>
+            </a:r>
+            <a:endParaRPr lang="ru-RU" dirty="0">
+              <a:latin typeface="Times New Roman" panose="02020603050405020304" pitchFamily="18" charset="0"/>
+              <a:cs typeface="Times New Roman" panose="02020603050405020304" pitchFamily="18" charset="0"/>
+            </a:endParaRPr>
+          </a:p>
+        </p:txBody>
+      </p:sp>
       <p:pic>
         <p:nvPicPr>
-          <p:cNvPr id="2" name="Рисунок 1" descr="Pong был скучным, а люди его любили / Хабр">
-            <a:extLst>
-              <a:ext uri="{FF2B5EF4-FFF2-40B4-BE49-F238E27FC236}">
-                <a16:creationId xmlns:a16="http://schemas.microsoft.com/office/drawing/2014/main" id="{12D2013F-7905-825E-76EC-1F5FD28F3079}"/>
+          <p:cNvPr id="2" name="Рисунок 1">
+            <a:extLst>
+              <a:ext uri="{FF2B5EF4-FFF2-40B4-BE49-F238E27FC236}">
+                <a16:creationId xmlns:a16="http://schemas.microsoft.com/office/drawing/2014/main" id="{385A61E1-A980-3EAD-1E86-0761EB8E6282}"/>
               </a:ext>
             </a:extLst>
           </p:cNvPr>
@@ -7749,38 +7262,47 @@
           <p:nvPr/>
         </p:nvPicPr>
         <p:blipFill>
-          <a:blip r:embed="rId3" cstate="print">
-            <a:extLst>
+          <a:blip r:embed="rId4" cstate="print">
+            <a:extLst>
+              <a:ext uri="{BEBA8EAE-BF5A-486C-A8C5-ECC9F3942E4B}">
+                <a14:imgProps xmlns:a14="http://schemas.microsoft.com/office/drawing/2010/main">
+                  <a14:imgLayer r:embed="rId5">
+                    <a14:imgEffect>
+                      <a14:saturation sat="400000"/>
+                    </a14:imgEffect>
+                  </a14:imgLayer>
+                </a14:imgProps>
+              </a:ext>
               <a:ext uri="{28A0092B-C50C-407E-A947-70E740481C1C}">
                 <a14:useLocalDpi xmlns:a14="http://schemas.microsoft.com/office/drawing/2010/main" val="0"/>
               </a:ext>
             </a:extLst>
           </a:blip>
-          <a:srcRect/>
           <a:stretch>
             <a:fillRect/>
           </a:stretch>
         </p:blipFill>
-        <p:spPr bwMode="auto">
-          <a:xfrm>
-            <a:off x="966499" y="2028022"/>
-            <a:ext cx="3532765" cy="1992722"/>
+        <p:spPr>
+          <a:xfrm>
+            <a:off x="1815702" y="873296"/>
+            <a:ext cx="1852289" cy="3294225"/>
           </a:xfrm>
           <a:prstGeom prst="rect">
             <a:avLst/>
           </a:prstGeom>
-          <a:noFill/>
           <a:ln>
-            <a:noFill/>
+            <a:solidFill>
+              <a:schemeClr val="tx1"/>
+            </a:solidFill>
           </a:ln>
         </p:spPr>
       </p:pic>
       <p:pic>
         <p:nvPicPr>
-          <p:cNvPr id="4" name="Рисунок 3" descr="Arkanoid — Википедия">
-            <a:extLst>
-              <a:ext uri="{FF2B5EF4-FFF2-40B4-BE49-F238E27FC236}">
-                <a16:creationId xmlns:a16="http://schemas.microsoft.com/office/drawing/2014/main" id="{5A63C168-4EB0-4313-6ED0-562691A1AAD3}"/>
+          <p:cNvPr id="3" name="Рисунок 2">
+            <a:extLst>
+              <a:ext uri="{FF2B5EF4-FFF2-40B4-BE49-F238E27FC236}">
+                <a16:creationId xmlns:a16="http://schemas.microsoft.com/office/drawing/2014/main" id="{AD7BCA04-CD60-3997-7502-395CB3B2B8C2}"/>
               </a:ext>
             </a:extLst>
           </p:cNvPr>
@@ -7790,27 +7312,19 @@
           <p:nvPr/>
         </p:nvPicPr>
         <p:blipFill>
-          <a:blip r:embed="rId4">
-            <a:extLst>
-              <a:ext uri="{28A0092B-C50C-407E-A947-70E740481C1C}">
-                <a14:useLocalDpi xmlns:a14="http://schemas.microsoft.com/office/drawing/2010/main" val="0"/>
-              </a:ext>
-            </a:extLst>
-          </a:blip>
-          <a:srcRect/>
+          <a:blip r:embed="rId6"/>
           <a:stretch>
             <a:fillRect/>
           </a:stretch>
         </p:blipFill>
-        <p:spPr bwMode="auto">
-          <a:xfrm>
-            <a:off x="7251724" y="878173"/>
-            <a:ext cx="3073977" cy="2881853"/>
+        <p:spPr>
+          <a:xfrm>
+            <a:off x="6540903" y="916109"/>
+            <a:ext cx="4899487" cy="2758188"/>
           </a:xfrm>
           <a:prstGeom prst="rect">
             <a:avLst/>
           </a:prstGeom>
-          <a:noFill/>
           <a:ln>
             <a:solidFill>
               <a:schemeClr val="tx1"/>
@@ -7821,7 +7335,7 @@
     </p:spTree>
     <p:extLst>
       <p:ext uri="{BB962C8B-B14F-4D97-AF65-F5344CB8AC3E}">
-        <p14:creationId xmlns:p14="http://schemas.microsoft.com/office/powerpoint/2010/main" val="4081661009"/>
+        <p14:creationId xmlns:p14="http://schemas.microsoft.com/office/powerpoint/2010/main" val="1413274795"/>
       </p:ext>
     </p:extLst>
   </p:cSld>
@@ -7866,7 +7380,7 @@
           <p:nvPr/>
         </p:nvPicPr>
         <p:blipFill>
-          <a:blip r:embed="rId3">
+          <a:blip r:embed="rId2">
             <a:extLst>
               <a:ext uri="{28A0092B-C50C-407E-A947-70E740481C1C}">
                 <a14:useLocalDpi xmlns:a14="http://schemas.microsoft.com/office/drawing/2010/main" val="0"/>
@@ -7900,10 +7414,10 @@
       </p:pic>
       <p:sp>
         <p:nvSpPr>
-          <p:cNvPr id="4" name="TextBox 3">
-            <a:extLst>
-              <a:ext uri="{FF2B5EF4-FFF2-40B4-BE49-F238E27FC236}">
-                <a16:creationId xmlns:a16="http://schemas.microsoft.com/office/drawing/2014/main" id="{D7937A3C-5B5F-3BD5-8E6B-4265B0D6EB56}"/>
+          <p:cNvPr id="3" name="TextBox 2">
+            <a:extLst>
+              <a:ext uri="{FF2B5EF4-FFF2-40B4-BE49-F238E27FC236}">
+                <a16:creationId xmlns:a16="http://schemas.microsoft.com/office/drawing/2014/main" id="{3BA06E7D-D943-B02A-4AE7-43C00BDA11AF}"/>
               </a:ext>
             </a:extLst>
           </p:cNvPr>
@@ -7912,8 +7426,8 @@
         </p:nvSpPr>
         <p:spPr>
           <a:xfrm>
-            <a:off x="1165383" y="329577"/>
-            <a:ext cx="3348037" cy="369332"/>
+            <a:off x="155408" y="84038"/>
+            <a:ext cx="3479332" cy="769441"/>
           </a:xfrm>
           <a:prstGeom prst="rect">
             <a:avLst/>
@@ -7926,92 +7440,13 @@
           </a:bodyPr>
           <a:lstStyle/>
           <a:p>
-            <a:pPr rtl="0"/>
-            <a:r>
-              <a:rPr lang="ru-RU" dirty="0">
-                <a:solidFill>
-                  <a:schemeClr val="accent1">
-                    <a:lumMod val="50000"/>
-                  </a:schemeClr>
-                </a:solidFill>
-                <a:effectLst>
-                  <a:outerShdw blurRad="38100" dist="38100" dir="2700000" algn="tl">
-                    <a:srgbClr val="000000">
-                      <a:alpha val="43137"/>
-                    </a:srgbClr>
-                  </a:outerShdw>
-                </a:effectLst>
+            <a:r>
+              <a:rPr lang="ru-RU" sz="4400" b="0" dirty="0">
                 <a:latin typeface="Bahnschrift SemiBold Condensed" panose="020B0502040204020203" pitchFamily="34" charset="0"/>
               </a:rPr>
-              <a:t>Программа </a:t>
-            </a:r>
-            <a:r>
-              <a:rPr lang="en-US" dirty="0">
-                <a:solidFill>
-                  <a:schemeClr val="accent1">
-                    <a:lumMod val="50000"/>
-                  </a:schemeClr>
-                </a:solidFill>
-                <a:effectLst>
-                  <a:outerShdw blurRad="38100" dist="38100" dir="2700000" algn="tl">
-                    <a:srgbClr val="000000">
-                      <a:alpha val="43137"/>
-                    </a:srgbClr>
-                  </a:outerShdw>
-                </a:effectLst>
-                <a:latin typeface="Bahnschrift SemiBold Condensed" panose="020B0502040204020203" pitchFamily="34" charset="0"/>
-              </a:rPr>
-              <a:t>3</a:t>
-            </a:r>
-            <a:r>
-              <a:rPr lang="ru-RU" dirty="0">
-                <a:solidFill>
-                  <a:schemeClr val="accent1">
-                    <a:lumMod val="50000"/>
-                  </a:schemeClr>
-                </a:solidFill>
-                <a:effectLst>
-                  <a:outerShdw blurRad="38100" dist="38100" dir="2700000" algn="tl">
-                    <a:srgbClr val="000000">
-                      <a:alpha val="43137"/>
-                    </a:srgbClr>
-                  </a:outerShdw>
-                </a:effectLst>
-                <a:latin typeface="Bahnschrift SemiBold Condensed" panose="020B0502040204020203" pitchFamily="34" charset="0"/>
-              </a:rPr>
-              <a:t> – </a:t>
-            </a:r>
-            <a:r>
-              <a:rPr lang="en-US" dirty="0">
-                <a:solidFill>
-                  <a:schemeClr val="accent1">
-                    <a:lumMod val="50000"/>
-                  </a:schemeClr>
-                </a:solidFill>
-                <a:effectLst>
-                  <a:outerShdw blurRad="38100" dist="38100" dir="2700000" algn="tl">
-                    <a:srgbClr val="000000">
-                      <a:alpha val="43137"/>
-                    </a:srgbClr>
-                  </a:outerShdw>
-                </a:effectLst>
-                <a:latin typeface="Bahnschrift SemiBold Condensed" panose="020B0502040204020203" pitchFamily="34" charset="0"/>
-              </a:rPr>
-              <a:t>Pong Masters (mobile)</a:t>
-            </a:r>
-            <a:endParaRPr lang="ru-RU" dirty="0">
-              <a:solidFill>
-                <a:schemeClr val="accent1">
-                  <a:lumMod val="50000"/>
-                </a:schemeClr>
-              </a:solidFill>
-              <a:effectLst>
-                <a:outerShdw blurRad="38100" dist="38100" dir="2700000" algn="tl">
-                  <a:srgbClr val="000000">
-                    <a:alpha val="43137"/>
-                  </a:srgbClr>
-                </a:outerShdw>
-              </a:effectLst>
+              <a:t>Схема алгоритма</a:t>
+            </a:r>
+            <a:endParaRPr lang="ru-RU" sz="4400" dirty="0">
               <a:latin typeface="Bahnschrift SemiBold Condensed" panose="020B0502040204020203" pitchFamily="34" charset="0"/>
             </a:endParaRPr>
           </a:p>
@@ -8019,10 +7454,10 @@
       </p:sp>
       <p:sp>
         <p:nvSpPr>
-          <p:cNvPr id="6" name="TextBox 5">
-            <a:extLst>
-              <a:ext uri="{FF2B5EF4-FFF2-40B4-BE49-F238E27FC236}">
-                <a16:creationId xmlns:a16="http://schemas.microsoft.com/office/drawing/2014/main" id="{7C771584-AA41-BE1D-A818-9872DC171AB3}"/>
+          <p:cNvPr id="8" name="TextBox 7">
+            <a:extLst>
+              <a:ext uri="{FF2B5EF4-FFF2-40B4-BE49-F238E27FC236}">
+                <a16:creationId xmlns:a16="http://schemas.microsoft.com/office/drawing/2014/main" id="{5A84AA39-D972-5ACD-97A0-99D6E07DE12D}"/>
               </a:ext>
             </a:extLst>
           </p:cNvPr>
@@ -8031,8 +7466,8 @@
         </p:nvSpPr>
         <p:spPr>
           <a:xfrm>
-            <a:off x="7377545" y="329577"/>
-            <a:ext cx="3233305" cy="369332"/>
+            <a:off x="-1" y="853479"/>
+            <a:ext cx="8198427" cy="5586145"/>
           </a:xfrm>
           <a:prstGeom prst="rect">
             <a:avLst/>
@@ -8045,223 +7480,61 @@
           </a:bodyPr>
           <a:lstStyle/>
           <a:p>
-            <a:pPr rtl="0"/>
-            <a:r>
-              <a:rPr lang="ru-RU" dirty="0">
-                <a:solidFill>
-                  <a:schemeClr val="accent1">
-                    <a:lumMod val="50000"/>
-                  </a:schemeClr>
-                </a:solidFill>
-                <a:effectLst>
-                  <a:outerShdw blurRad="38100" dist="38100" dir="2700000" algn="tl">
-                    <a:srgbClr val="000000">
-                      <a:alpha val="43137"/>
-                    </a:srgbClr>
-                  </a:outerShdw>
-                </a:effectLst>
-                <a:latin typeface="Bahnschrift SemiBold Condensed" panose="020B0502040204020203" pitchFamily="34" charset="0"/>
-              </a:rPr>
-              <a:t>Программа </a:t>
-            </a:r>
-            <a:r>
-              <a:rPr lang="en-US" dirty="0">
-                <a:solidFill>
-                  <a:schemeClr val="accent1">
-                    <a:lumMod val="50000"/>
-                  </a:schemeClr>
-                </a:solidFill>
-                <a:effectLst>
-                  <a:outerShdw blurRad="38100" dist="38100" dir="2700000" algn="tl">
-                    <a:srgbClr val="000000">
-                      <a:alpha val="43137"/>
-                    </a:srgbClr>
-                  </a:outerShdw>
-                </a:effectLst>
-                <a:latin typeface="Bahnschrift SemiBold Condensed" panose="020B0502040204020203" pitchFamily="34" charset="0"/>
-              </a:rPr>
-              <a:t>4</a:t>
-            </a:r>
-            <a:r>
-              <a:rPr lang="ru-RU" dirty="0">
-                <a:solidFill>
-                  <a:schemeClr val="accent1">
-                    <a:lumMod val="50000"/>
-                  </a:schemeClr>
-                </a:solidFill>
-                <a:effectLst>
-                  <a:outerShdw blurRad="38100" dist="38100" dir="2700000" algn="tl">
-                    <a:srgbClr val="000000">
-                      <a:alpha val="43137"/>
-                    </a:srgbClr>
-                  </a:outerShdw>
-                </a:effectLst>
-                <a:latin typeface="Bahnschrift SemiBold Condensed" panose="020B0502040204020203" pitchFamily="34" charset="0"/>
-              </a:rPr>
-              <a:t> – </a:t>
-            </a:r>
-            <a:r>
-              <a:rPr lang="en-US" dirty="0">
-                <a:solidFill>
-                  <a:schemeClr val="accent1">
-                    <a:lumMod val="50000"/>
-                  </a:schemeClr>
-                </a:solidFill>
-                <a:effectLst>
-                  <a:outerShdw blurRad="38100" dist="38100" dir="2700000" algn="tl">
-                    <a:srgbClr val="000000">
-                      <a:alpha val="43137"/>
-                    </a:srgbClr>
-                  </a:outerShdw>
-                </a:effectLst>
-                <a:latin typeface="Bahnschrift SemiBold Condensed" panose="020B0502040204020203" pitchFamily="34" charset="0"/>
-              </a:rPr>
-              <a:t>Pong Classic (</a:t>
-            </a:r>
-            <a:r>
-              <a:rPr lang="ru-RU" dirty="0">
-                <a:solidFill>
-                  <a:schemeClr val="accent1">
-                    <a:lumMod val="50000"/>
-                  </a:schemeClr>
-                </a:solidFill>
-                <a:effectLst>
-                  <a:outerShdw blurRad="38100" dist="38100" dir="2700000" algn="tl">
-                    <a:srgbClr val="000000">
-                      <a:alpha val="43137"/>
-                    </a:srgbClr>
-                  </a:outerShdw>
-                </a:effectLst>
-                <a:latin typeface="Bahnschrift SemiBold Condensed" panose="020B0502040204020203" pitchFamily="34" charset="0"/>
-              </a:rPr>
-              <a:t>Яндекс</a:t>
-            </a:r>
-            <a:r>
-              <a:rPr lang="en-US" dirty="0">
-                <a:solidFill>
-                  <a:schemeClr val="accent1">
-                    <a:lumMod val="50000"/>
-                  </a:schemeClr>
-                </a:solidFill>
-                <a:effectLst>
-                  <a:outerShdw blurRad="38100" dist="38100" dir="2700000" algn="tl">
-                    <a:srgbClr val="000000">
-                      <a:alpha val="43137"/>
-                    </a:srgbClr>
-                  </a:outerShdw>
-                </a:effectLst>
-                <a:latin typeface="Bahnschrift SemiBold Condensed" panose="020B0502040204020203" pitchFamily="34" charset="0"/>
-              </a:rPr>
-              <a:t>)</a:t>
-            </a:r>
-            <a:endParaRPr lang="ru-RU" dirty="0">
-              <a:solidFill>
-                <a:schemeClr val="accent1">
-                  <a:lumMod val="50000"/>
-                </a:schemeClr>
-              </a:solidFill>
-              <a:effectLst>
-                <a:outerShdw blurRad="38100" dist="38100" dir="2700000" algn="tl">
-                  <a:srgbClr val="000000">
-                    <a:alpha val="43137"/>
-                  </a:srgbClr>
-                </a:outerShdw>
-              </a:effectLst>
-              <a:latin typeface="Bahnschrift SemiBold Condensed" panose="020B0502040204020203" pitchFamily="34" charset="0"/>
-            </a:endParaRPr>
-          </a:p>
-        </p:txBody>
-      </p:sp>
-      <p:sp>
-        <p:nvSpPr>
-          <p:cNvPr id="16" name="TextBox 15">
-            <a:extLst>
-              <a:ext uri="{FF2B5EF4-FFF2-40B4-BE49-F238E27FC236}">
-                <a16:creationId xmlns:a16="http://schemas.microsoft.com/office/drawing/2014/main" id="{CDDEE9EB-50E3-EFE7-08CD-F8573B593AE6}"/>
-              </a:ext>
-            </a:extLst>
-          </p:cNvPr>
-          <p:cNvSpPr txBox="1"/>
-          <p:nvPr/>
-        </p:nvSpPr>
-        <p:spPr>
-          <a:xfrm>
-            <a:off x="269773" y="4341908"/>
-            <a:ext cx="5464493" cy="2031325"/>
-          </a:xfrm>
-          <a:prstGeom prst="rect">
-            <a:avLst/>
-          </a:prstGeom>
-          <a:noFill/>
-        </p:spPr>
-        <p:txBody>
-          <a:bodyPr wrap="square">
-            <a:spAutoFit/>
-          </a:bodyPr>
-          <a:lstStyle/>
-          <a:p>
-            <a:r>
-              <a:rPr lang="ru-BY" dirty="0">
+            <a:pPr indent="363538"/>
+            <a:r>
+              <a:rPr lang="ru-BY" sz="2100" dirty="0">
                 <a:latin typeface="Times New Roman" panose="02020603050405020304" pitchFamily="18" charset="0"/>
                 <a:cs typeface="Times New Roman" panose="02020603050405020304" pitchFamily="18" charset="0"/>
               </a:rPr>
-              <a:t>Современные мобильные игры, отличающиеся простой графикой, управлением касанием и бесплатным распространением с рекламой. Сильные стороны – доступность и простота управления для сенсорных экранов. К слабым сторонам относятся примитивная физика, наличие рекламы и микротранзакций, а также отсутствие глубины.</a:t>
-            </a:r>
-            <a:endParaRPr lang="ru-RU" dirty="0">
+              <a:t>Для успешного проектирования программного обеспечения важно тщательно продумать алгоритмы, которые будут использоваться в программе. Одним из ключевых аспектов разработки игрового приложения является организация игрового цикла – основы любой игры.</a:t>
+            </a:r>
+          </a:p>
+          <a:p>
+            <a:pPr indent="363538"/>
+            <a:r>
+              <a:rPr lang="ru-BY" sz="2100" dirty="0">
+                <a:latin typeface="Times New Roman" panose="02020603050405020304" pitchFamily="18" charset="0"/>
+                <a:cs typeface="Times New Roman" panose="02020603050405020304" pitchFamily="18" charset="0"/>
+              </a:rPr>
+              <a:t>В рамках программного обеспечения «PING PONG» алгоритм игрового цикла включает следующие этапы: обработка ввода с клавиатуры (клавиши W, S, стрелки, P, </a:t>
+            </a:r>
+            <a:r>
+              <a:rPr lang="ru-BY" sz="2100" dirty="0" err="1">
+                <a:latin typeface="Times New Roman" panose="02020603050405020304" pitchFamily="18" charset="0"/>
+                <a:cs typeface="Times New Roman" panose="02020603050405020304" pitchFamily="18" charset="0"/>
+              </a:rPr>
+              <a:t>Esc</a:t>
+            </a:r>
+            <a:r>
+              <a:rPr lang="ru-BY" sz="2100" dirty="0">
+                <a:latin typeface="Times New Roman" panose="02020603050405020304" pitchFamily="18" charset="0"/>
+                <a:cs typeface="Times New Roman" panose="02020603050405020304" pitchFamily="18" charset="0"/>
+              </a:rPr>
+              <a:t>), обновление координат ракеток с учётом нажатых клавиш и границ поля, расчёт нового положения мяча согласно формулам движения, проверка столкновений с границами поля и ракетками, фиксация голов с обновлением счёта и возвратом мяча в центр, проверка достижения 11 очков для завершения игры, а также отрисовка кадра с использованием двойной буферизации для устранения мерцания. </a:t>
+            </a:r>
+            <a:endParaRPr lang="ru-RU" sz="2100" dirty="0">
               <a:latin typeface="Times New Roman" panose="02020603050405020304" pitchFamily="18" charset="0"/>
               <a:cs typeface="Times New Roman" panose="02020603050405020304" pitchFamily="18" charset="0"/>
             </a:endParaRPr>
           </a:p>
-        </p:txBody>
-      </p:sp>
-      <p:sp>
-        <p:nvSpPr>
-          <p:cNvPr id="18" name="TextBox 17">
-            <a:extLst>
-              <a:ext uri="{FF2B5EF4-FFF2-40B4-BE49-F238E27FC236}">
-                <a16:creationId xmlns:a16="http://schemas.microsoft.com/office/drawing/2014/main" id="{2759F956-07D7-40C9-4B85-46ECB378B6D4}"/>
-              </a:ext>
-            </a:extLst>
-          </p:cNvPr>
-          <p:cNvSpPr txBox="1"/>
-          <p:nvPr/>
-        </p:nvSpPr>
-        <p:spPr>
-          <a:xfrm>
-            <a:off x="6004038" y="3789339"/>
-            <a:ext cx="6187962" cy="2862322"/>
-          </a:xfrm>
-          <a:prstGeom prst="rect">
-            <a:avLst/>
-          </a:prstGeom>
-          <a:noFill/>
-        </p:spPr>
-        <p:txBody>
-          <a:bodyPr wrap="square">
-            <a:spAutoFit/>
-          </a:bodyPr>
-          <a:lstStyle/>
-          <a:p>
-            <a:r>
-              <a:rPr lang="ru-BY" dirty="0">
+          <a:p>
+            <a:pPr indent="363538"/>
+            <a:r>
+              <a:rPr lang="ru-BY" sz="2100" dirty="0">
                 <a:latin typeface="Times New Roman" panose="02020603050405020304" pitchFamily="18" charset="0"/>
                 <a:cs typeface="Times New Roman" panose="02020603050405020304" pitchFamily="18" charset="0"/>
               </a:rPr>
-              <a:t>Браузерная игра, доступная на платформе Яндекс Игры. Представляет собой минималистичную двумерную версию с двумя ракетками, мячом и цифровым табло. Управление осуществляется клавишами W/S и стрелками. Доступен режим против компьютера. Сильные стороны – запуск в браузере без установки, понятное управление, наличие ИИ и таблица рекордов. Слабые стороны – примитивная физика (угол отскока не меняется), отсутствие звука, рекламные вставки, отсутствие настройки сложности ИИ и невозможность сетевой игры.</a:t>
-            </a:r>
-            <a:endParaRPr lang="ru-RU" dirty="0">
-              <a:latin typeface="Times New Roman" panose="02020603050405020304" pitchFamily="18" charset="0"/>
-              <a:cs typeface="Times New Roman" panose="02020603050405020304" pitchFamily="18" charset="0"/>
-            </a:endParaRPr>
+              <a:t>Циклическая структура алгоритма обеспечивает непрерывную работу игры до достижения одним из игроков победы, после чего отображается экран окончания матча с указанием победителя.</a:t>
+            </a:r>
           </a:p>
         </p:txBody>
       </p:sp>
       <p:pic>
         <p:nvPicPr>
-          <p:cNvPr id="2" name="Рисунок 1">
-            <a:extLst>
-              <a:ext uri="{FF2B5EF4-FFF2-40B4-BE49-F238E27FC236}">
-                <a16:creationId xmlns:a16="http://schemas.microsoft.com/office/drawing/2014/main" id="{385A61E1-A980-3EAD-1E86-0761EB8E6282}"/>
+          <p:cNvPr id="5" name="Рисунок 4">
+            <a:extLst>
+              <a:ext uri="{FF2B5EF4-FFF2-40B4-BE49-F238E27FC236}">
+                <a16:creationId xmlns:a16="http://schemas.microsoft.com/office/drawing/2014/main" id="{ACD20F56-8D07-ED5D-351D-572B44BC4FDA}"/>
               </a:ext>
             </a:extLst>
           </p:cNvPr>
@@ -8271,17 +7544,8 @@
           <p:nvPr/>
         </p:nvPicPr>
         <p:blipFill>
-          <a:blip r:embed="rId4" cstate="print">
-            <a:extLst>
-              <a:ext uri="{BEBA8EAE-BF5A-486C-A8C5-ECC9F3942E4B}">
-                <a14:imgProps xmlns:a14="http://schemas.microsoft.com/office/drawing/2010/main">
-                  <a14:imgLayer r:embed="rId5">
-                    <a14:imgEffect>
-                      <a14:saturation sat="400000"/>
-                    </a14:imgEffect>
-                  </a14:imgLayer>
-                </a14:imgProps>
-              </a:ext>
+          <a:blip r:embed="rId3">
+            <a:extLst>
               <a:ext uri="{28A0092B-C50C-407E-A947-70E740481C1C}">
                 <a14:useLocalDpi xmlns:a14="http://schemas.microsoft.com/office/drawing/2010/main" val="0"/>
               </a:ext>
@@ -8293,58 +7557,18 @@
         </p:blipFill>
         <p:spPr>
           <a:xfrm>
-            <a:off x="1815702" y="873296"/>
-            <a:ext cx="1852289" cy="3294225"/>
+            <a:off x="8479907" y="0"/>
+            <a:ext cx="2921458" cy="6858000"/>
           </a:xfrm>
           <a:prstGeom prst="rect">
             <a:avLst/>
           </a:prstGeom>
-          <a:ln>
-            <a:solidFill>
-              <a:schemeClr val="tx1"/>
-            </a:solidFill>
-          </a:ln>
-        </p:spPr>
-      </p:pic>
-      <p:pic>
-        <p:nvPicPr>
-          <p:cNvPr id="3" name="Рисунок 2">
-            <a:extLst>
-              <a:ext uri="{FF2B5EF4-FFF2-40B4-BE49-F238E27FC236}">
-                <a16:creationId xmlns:a16="http://schemas.microsoft.com/office/drawing/2014/main" id="{AD7BCA04-CD60-3997-7502-395CB3B2B8C2}"/>
-              </a:ext>
-            </a:extLst>
-          </p:cNvPr>
-          <p:cNvPicPr>
-            <a:picLocks noChangeAspect="1"/>
-          </p:cNvPicPr>
-          <p:nvPr/>
-        </p:nvPicPr>
-        <p:blipFill>
-          <a:blip r:embed="rId6"/>
-          <a:stretch>
-            <a:fillRect/>
-          </a:stretch>
-        </p:blipFill>
-        <p:spPr>
-          <a:xfrm>
-            <a:off x="6540903" y="916109"/>
-            <a:ext cx="4899487" cy="2758188"/>
-          </a:xfrm>
-          <a:prstGeom prst="rect">
-            <a:avLst/>
-          </a:prstGeom>
-          <a:ln>
-            <a:solidFill>
-              <a:schemeClr val="tx1"/>
-            </a:solidFill>
-          </a:ln>
         </p:spPr>
       </p:pic>
     </p:spTree>
     <p:extLst>
       <p:ext uri="{BB962C8B-B14F-4D97-AF65-F5344CB8AC3E}">
-        <p14:creationId xmlns:p14="http://schemas.microsoft.com/office/powerpoint/2010/main" val="1413274795"/>
+        <p14:creationId xmlns:p14="http://schemas.microsoft.com/office/powerpoint/2010/main" val="4042661150"/>
       </p:ext>
     </p:extLst>
   </p:cSld>
@@ -8423,10 +7647,10 @@
       </p:pic>
       <p:sp>
         <p:nvSpPr>
-          <p:cNvPr id="3" name="TextBox 2">
-            <a:extLst>
-              <a:ext uri="{FF2B5EF4-FFF2-40B4-BE49-F238E27FC236}">
-                <a16:creationId xmlns:a16="http://schemas.microsoft.com/office/drawing/2014/main" id="{1352924B-24D4-40AA-707B-49770F7C0837}"/>
+          <p:cNvPr id="6" name="TextBox 5">
+            <a:extLst>
+              <a:ext uri="{FF2B5EF4-FFF2-40B4-BE49-F238E27FC236}">
+                <a16:creationId xmlns:a16="http://schemas.microsoft.com/office/drawing/2014/main" id="{62384299-23C2-40F9-7D08-8895DC3A6037}"/>
               </a:ext>
             </a:extLst>
           </p:cNvPr>
@@ -8435,8 +7659,8 @@
         </p:nvSpPr>
         <p:spPr>
           <a:xfrm>
-            <a:off x="3768072" y="2921168"/>
-            <a:ext cx="4655856" cy="1015663"/>
+            <a:off x="192505" y="0"/>
+            <a:ext cx="6096000" cy="769441"/>
           </a:xfrm>
           <a:prstGeom prst="rect">
             <a:avLst/>
@@ -8450,23 +7674,73 @@
           <a:lstStyle/>
           <a:p>
             <a:r>
-              <a:rPr lang="ru-RU" sz="6000" b="0" dirty="0">
+              <a:rPr lang="ru-RU" sz="4400" b="0" dirty="0">
                 <a:latin typeface="Bahnschrift SemiBold Condensed" panose="020B0502040204020203" pitchFamily="34" charset="0"/>
               </a:rPr>
-              <a:t>Проектирование</a:t>
-            </a:r>
-            <a:endParaRPr lang="ru-RU" sz="6000" dirty="0">
+              <a:t>Диаграмма </a:t>
+            </a:r>
+            <a:r>
+              <a:rPr lang="en-US" sz="4400" b="0" dirty="0">
+                <a:latin typeface="Bahnschrift SemiBold Condensed" panose="020B0502040204020203" pitchFamily="34" charset="0"/>
+              </a:rPr>
+              <a:t>IDEF0</a:t>
+            </a:r>
+            <a:endParaRPr lang="ru-RU" sz="4400" dirty="0">
               <a:latin typeface="Bahnschrift SemiBold Condensed" panose="020B0502040204020203" pitchFamily="34" charset="0"/>
             </a:endParaRPr>
           </a:p>
         </p:txBody>
       </p:sp>
+      <p:sp>
+        <p:nvSpPr>
+          <p:cNvPr id="4" name="Прямоугольник 3">
+            <a:extLst>
+              <a:ext uri="{FF2B5EF4-FFF2-40B4-BE49-F238E27FC236}">
+                <a16:creationId xmlns:a16="http://schemas.microsoft.com/office/drawing/2014/main" id="{8D52D455-7125-3DFD-63C9-E1B319BD9AA6}"/>
+              </a:ext>
+            </a:extLst>
+          </p:cNvPr>
+          <p:cNvSpPr/>
+          <p:nvPr/>
+        </p:nvSpPr>
+        <p:spPr>
+          <a:xfrm>
+            <a:off x="1932709" y="769441"/>
+            <a:ext cx="8416636" cy="5839177"/>
+          </a:xfrm>
+          <a:prstGeom prst="rect">
+            <a:avLst/>
+          </a:prstGeom>
+        </p:spPr>
+        <p:style>
+          <a:lnRef idx="2">
+            <a:schemeClr val="accent6"/>
+          </a:lnRef>
+          <a:fillRef idx="1">
+            <a:schemeClr val="lt1"/>
+          </a:fillRef>
+          <a:effectRef idx="0">
+            <a:schemeClr val="accent6"/>
+          </a:effectRef>
+          <a:fontRef idx="minor">
+            <a:schemeClr val="dk1"/>
+          </a:fontRef>
+        </p:style>
+        <p:txBody>
+          <a:bodyPr rtlCol="0" anchor="ctr"/>
+          <a:lstStyle/>
+          <a:p>
+            <a:pPr algn="ctr"/>
+            <a:endParaRPr lang="ru-BY"/>
+          </a:p>
+        </p:txBody>
+      </p:sp>
       <p:pic>
         <p:nvPicPr>
-          <p:cNvPr id="6" name="Рисунок 5">
-            <a:extLst>
-              <a:ext uri="{FF2B5EF4-FFF2-40B4-BE49-F238E27FC236}">
-                <a16:creationId xmlns:a16="http://schemas.microsoft.com/office/drawing/2014/main" id="{9ACDEBF9-DAAE-658C-7C2C-718F61ACBC77}"/>
+          <p:cNvPr id="3" name="Рисунок 2">
+            <a:extLst>
+              <a:ext uri="{FF2B5EF4-FFF2-40B4-BE49-F238E27FC236}">
+                <a16:creationId xmlns:a16="http://schemas.microsoft.com/office/drawing/2014/main" id="{52F75B21-7F4D-1F5E-4E43-5789066623BC}"/>
               </a:ext>
             </a:extLst>
           </p:cNvPr>
@@ -8476,37 +7750,25 @@
           <p:nvPr/>
         </p:nvPicPr>
         <p:blipFill>
-          <a:blip r:embed="rId3">
-            <a:extLst>
-              <a:ext uri="{28A0092B-C50C-407E-A947-70E740481C1C}">
-                <a14:useLocalDpi xmlns:a14="http://schemas.microsoft.com/office/drawing/2010/main" val="0"/>
-              </a:ext>
-            </a:extLst>
-          </a:blip>
+          <a:blip r:embed="rId3"/>
           <a:stretch>
             <a:fillRect/>
           </a:stretch>
         </p:blipFill>
         <p:spPr>
           <a:xfrm>
-            <a:off x="9275534" y="4052968"/>
-            <a:ext cx="2452423" cy="2427184"/>
-          </a:xfrm>
-          <a:prstGeom prst="ellipse">
+            <a:off x="1620982" y="604517"/>
+            <a:ext cx="12192000" cy="6106166"/>
+          </a:xfrm>
+          <a:prstGeom prst="rect">
             <a:avLst/>
           </a:prstGeom>
-          <a:ln>
-            <a:noFill/>
-          </a:ln>
-          <a:effectLst>
-            <a:softEdge rad="112500"/>
-          </a:effectLst>
         </p:spPr>
       </p:pic>
     </p:spTree>
     <p:extLst>
       <p:ext uri="{BB962C8B-B14F-4D97-AF65-F5344CB8AC3E}">
-        <p14:creationId xmlns:p14="http://schemas.microsoft.com/office/powerpoint/2010/main" val="4203919689"/>
+        <p14:creationId xmlns:p14="http://schemas.microsoft.com/office/powerpoint/2010/main" val="3329932431"/>
       </p:ext>
     </p:extLst>
   </p:cSld>
